--- a/koreatech-db/weeks/05주차_SELECT_기본.pptx
+++ b/koreatech-db/weeks/05주차_SELECT_기본.pptx
@@ -4180,9 +4180,9 @@
                 <a:solidFill>
                   <a:srgbClr val="7A869C"/>
                 </a:solidFill>
-                <a:latin typeface="나눔고딕코딩"/>
-                <a:ea typeface="나눔고딕코딩"/>
-                <a:cs typeface="나눔고딕코딩"/>
+                <a:latin typeface="D2Coding"/>
+                <a:ea typeface="D2Coding"/>
+                <a:cs typeface="D2Coding"/>
               </a:rPr>
               <a:t>1</a:t>
             </a:r>
@@ -4198,9 +4198,9 @@
                 <a:solidFill>
                   <a:srgbClr val="7A869C"/>
                 </a:solidFill>
-                <a:latin typeface="나눔고딕코딩"/>
-                <a:ea typeface="나눔고딕코딩"/>
-                <a:cs typeface="나눔고딕코딩"/>
+                <a:latin typeface="D2Coding"/>
+                <a:ea typeface="D2Coding"/>
+                <a:cs typeface="D2Coding"/>
               </a:rPr>
               <a:t>2</a:t>
             </a:r>
@@ -4216,9 +4216,9 @@
                 <a:solidFill>
                   <a:srgbClr val="7A869C"/>
                 </a:solidFill>
-                <a:latin typeface="나눔고딕코딩"/>
-                <a:ea typeface="나눔고딕코딩"/>
-                <a:cs typeface="나눔고딕코딩"/>
+                <a:latin typeface="D2Coding"/>
+                <a:ea typeface="D2Coding"/>
+                <a:cs typeface="D2Coding"/>
               </a:rPr>
               <a:t>3</a:t>
             </a:r>
@@ -4234,9 +4234,9 @@
                 <a:solidFill>
                   <a:srgbClr val="7A869C"/>
                 </a:solidFill>
-                <a:latin typeface="나눔고딕코딩"/>
-                <a:ea typeface="나눔고딕코딩"/>
-                <a:cs typeface="나눔고딕코딩"/>
+                <a:latin typeface="D2Coding"/>
+                <a:ea typeface="D2Coding"/>
+                <a:cs typeface="D2Coding"/>
               </a:rPr>
               <a:t>4</a:t>
             </a:r>
@@ -4252,9 +4252,9 @@
                 <a:solidFill>
                   <a:srgbClr val="7A869C"/>
                 </a:solidFill>
-                <a:latin typeface="나눔고딕코딩"/>
-                <a:ea typeface="나눔고딕코딩"/>
-                <a:cs typeface="나눔고딕코딩"/>
+                <a:latin typeface="D2Coding"/>
+                <a:ea typeface="D2Coding"/>
+                <a:cs typeface="D2Coding"/>
               </a:rPr>
               <a:t>5</a:t>
             </a:r>
@@ -4270,9 +4270,9 @@
                 <a:solidFill>
                   <a:srgbClr val="7A869C"/>
                 </a:solidFill>
-                <a:latin typeface="나눔고딕코딩"/>
-                <a:ea typeface="나눔고딕코딩"/>
-                <a:cs typeface="나눔고딕코딩"/>
+                <a:latin typeface="D2Coding"/>
+                <a:ea typeface="D2Coding"/>
+                <a:cs typeface="D2Coding"/>
               </a:rPr>
               <a:t>6</a:t>
             </a:r>
@@ -4288,9 +4288,9 @@
                 <a:solidFill>
                   <a:srgbClr val="7A869C"/>
                 </a:solidFill>
-                <a:latin typeface="나눔고딕코딩"/>
-                <a:ea typeface="나눔고딕코딩"/>
-                <a:cs typeface="나눔고딕코딩"/>
+                <a:latin typeface="D2Coding"/>
+                <a:ea typeface="D2Coding"/>
+                <a:cs typeface="D2Coding"/>
               </a:rPr>
               <a:t>7</a:t>
             </a:r>
@@ -4306,9 +4306,9 @@
                 <a:solidFill>
                   <a:srgbClr val="7A869C"/>
                 </a:solidFill>
-                <a:latin typeface="나눔고딕코딩"/>
-                <a:ea typeface="나눔고딕코딩"/>
-                <a:cs typeface="나눔고딕코딩"/>
+                <a:latin typeface="D2Coding"/>
+                <a:ea typeface="D2Coding"/>
+                <a:cs typeface="D2Coding"/>
               </a:rPr>
               <a:t>8</a:t>
             </a:r>
@@ -4324,9 +4324,9 @@
                 <a:solidFill>
                   <a:srgbClr val="7A869C"/>
                 </a:solidFill>
-                <a:latin typeface="나눔고딕코딩"/>
-                <a:ea typeface="나눔고딕코딩"/>
-                <a:cs typeface="나눔고딕코딩"/>
+                <a:latin typeface="D2Coding"/>
+                <a:ea typeface="D2Coding"/>
+                <a:cs typeface="D2Coding"/>
               </a:rPr>
               <a:t>9</a:t>
             </a:r>
@@ -4342,9 +4342,9 @@
                 <a:solidFill>
                   <a:srgbClr val="7A869C"/>
                 </a:solidFill>
-                <a:latin typeface="나눔고딕코딩"/>
-                <a:ea typeface="나눔고딕코딩"/>
-                <a:cs typeface="나눔고딕코딩"/>
+                <a:latin typeface="D2Coding"/>
+                <a:ea typeface="D2Coding"/>
+                <a:cs typeface="D2Coding"/>
               </a:rPr>
               <a:t>10</a:t>
             </a:r>
@@ -4360,9 +4360,9 @@
                 <a:solidFill>
                   <a:srgbClr val="7A869C"/>
                 </a:solidFill>
-                <a:latin typeface="나눔고딕코딩"/>
-                <a:ea typeface="나눔고딕코딩"/>
-                <a:cs typeface="나눔고딕코딩"/>
+                <a:latin typeface="D2Coding"/>
+                <a:ea typeface="D2Coding"/>
+                <a:cs typeface="D2Coding"/>
               </a:rPr>
               <a:t>11</a:t>
             </a:r>
@@ -4378,9 +4378,9 @@
                 <a:solidFill>
                   <a:srgbClr val="7A869C"/>
                 </a:solidFill>
-                <a:latin typeface="나눔고딕코딩"/>
-                <a:ea typeface="나눔고딕코딩"/>
-                <a:cs typeface="나눔고딕코딩"/>
+                <a:latin typeface="D2Coding"/>
+                <a:ea typeface="D2Coding"/>
+                <a:cs typeface="D2Coding"/>
               </a:rPr>
               <a:t>12</a:t>
             </a:r>
@@ -4396,9 +4396,9 @@
                 <a:solidFill>
                   <a:srgbClr val="7A869C"/>
                 </a:solidFill>
-                <a:latin typeface="나눔고딕코딩"/>
-                <a:ea typeface="나눔고딕코딩"/>
-                <a:cs typeface="나눔고딕코딩"/>
+                <a:latin typeface="D2Coding"/>
+                <a:ea typeface="D2Coding"/>
+                <a:cs typeface="D2Coding"/>
               </a:rPr>
               <a:t>13</a:t>
             </a:r>
@@ -4437,9 +4437,9 @@
                 <a:solidFill>
                   <a:srgbClr val="E6EAF2"/>
                 </a:solidFill>
-                <a:latin typeface="나눔고딕코딩"/>
-                <a:ea typeface="나눔고딕코딩"/>
-                <a:cs typeface="나눔고딕코딩"/>
+                <a:latin typeface="D2Coding"/>
+                <a:ea typeface="D2Coding"/>
+                <a:cs typeface="D2Coding"/>
               </a:rPr>
               <a:t>-- AND: 두 조건 모두 만족 — 서울에 사는 VIP 고객</a:t>
             </a:r>
@@ -4455,9 +4455,9 @@
                 <a:solidFill>
                   <a:srgbClr val="E6EAF2"/>
                 </a:solidFill>
-                <a:latin typeface="나눔고딕코딩"/>
-                <a:ea typeface="나눔고딕코딩"/>
-                <a:cs typeface="나눔고딕코딩"/>
+                <a:latin typeface="D2Coding"/>
+                <a:ea typeface="D2Coding"/>
+                <a:cs typeface="D2Coding"/>
               </a:rPr>
               <a:t>SELECT name, city, points</a:t>
             </a:r>
@@ -4473,9 +4473,9 @@
                 <a:solidFill>
                   <a:srgbClr val="E6EAF2"/>
                 </a:solidFill>
-                <a:latin typeface="나눔고딕코딩"/>
-                <a:ea typeface="나눔고딕코딩"/>
-                <a:cs typeface="나눔고딕코딩"/>
+                <a:latin typeface="D2Coding"/>
+                <a:ea typeface="D2Coding"/>
+                <a:cs typeface="D2Coding"/>
               </a:rPr>
               <a:t>FROM   customers</a:t>
             </a:r>
@@ -4491,9 +4491,9 @@
                 <a:solidFill>
                   <a:srgbClr val="E6EAF2"/>
                 </a:solidFill>
-                <a:latin typeface="나눔고딕코딩"/>
-                <a:ea typeface="나눔고딕코딩"/>
-                <a:cs typeface="나눔고딕코딩"/>
+                <a:latin typeface="D2Coding"/>
+                <a:ea typeface="D2Coding"/>
+                <a:cs typeface="D2Coding"/>
               </a:rPr>
               <a:t>WHERE  grade = 'VIP' AND city = '서울';</a:t>
             </a:r>
@@ -4509,9 +4509,9 @@
                 <a:solidFill>
                   <a:srgbClr val="E6EAF2"/>
                 </a:solidFill>
-                <a:latin typeface="나눔고딕코딩"/>
-                <a:ea typeface="나눔고딕코딩"/>
-                <a:cs typeface="나눔고딕코딩"/>
+                <a:latin typeface="D2Coding"/>
+                <a:ea typeface="D2Coding"/>
+                <a:cs typeface="D2Coding"/>
               </a:rPr>
               <a:t>-- 결과: 한가람</a:t>
             </a:r>
@@ -4527,9 +4527,9 @@
                 <a:solidFill>
                   <a:srgbClr val="E6EAF2"/>
                 </a:solidFill>
-                <a:latin typeface="나눔고딕코딩"/>
-                <a:ea typeface="나눔고딕코딩"/>
-                <a:cs typeface="나눔고딕코딩"/>
+                <a:latin typeface="D2Coding"/>
+                <a:ea typeface="D2Coding"/>
+                <a:cs typeface="D2Coding"/>
               </a:rPr>
               <a:t/>
             </a:r>
@@ -4545,9 +4545,9 @@
                 <a:solidFill>
                   <a:srgbClr val="E6EAF2"/>
                 </a:solidFill>
-                <a:latin typeface="나눔고딕코딩"/>
-                <a:ea typeface="나눔고딕코딩"/>
-                <a:cs typeface="나눔고딕코딩"/>
+                <a:latin typeface="D2Coding"/>
+                <a:ea typeface="D2Coding"/>
+                <a:cs typeface="D2Coding"/>
               </a:rPr>
               <a:t>-- OR: 둘 중 하나 만족</a:t>
             </a:r>
@@ -4563,9 +4563,9 @@
                 <a:solidFill>
                   <a:srgbClr val="E6EAF2"/>
                 </a:solidFill>
-                <a:latin typeface="나눔고딕코딩"/>
-                <a:ea typeface="나눔고딕코딩"/>
-                <a:cs typeface="나눔고딕코딩"/>
+                <a:latin typeface="D2Coding"/>
+                <a:ea typeface="D2Coding"/>
+                <a:cs typeface="D2Coding"/>
               </a:rPr>
               <a:t>SELECT name FROM customers</a:t>
             </a:r>
@@ -4581,9 +4581,9 @@
                 <a:solidFill>
                   <a:srgbClr val="E6EAF2"/>
                 </a:solidFill>
-                <a:latin typeface="나눔고딕코딩"/>
-                <a:ea typeface="나눔고딕코딩"/>
-                <a:cs typeface="나눔고딕코딩"/>
+                <a:latin typeface="D2Coding"/>
+                <a:ea typeface="D2Coding"/>
+                <a:cs typeface="D2Coding"/>
               </a:rPr>
               <a:t>WHERE  grade = 'VIP' OR grade = 'GOLD';</a:t>
             </a:r>
@@ -4599,9 +4599,9 @@
                 <a:solidFill>
                   <a:srgbClr val="E6EAF2"/>
                 </a:solidFill>
-                <a:latin typeface="나눔고딕코딩"/>
-                <a:ea typeface="나눔고딕코딩"/>
-                <a:cs typeface="나눔고딕코딩"/>
+                <a:latin typeface="D2Coding"/>
+                <a:ea typeface="D2Coding"/>
+                <a:cs typeface="D2Coding"/>
               </a:rPr>
               <a:t/>
             </a:r>
@@ -4617,9 +4617,9 @@
                 <a:solidFill>
                   <a:srgbClr val="E6EAF2"/>
                 </a:solidFill>
-                <a:latin typeface="나눔고딕코딩"/>
-                <a:ea typeface="나눔고딕코딩"/>
-                <a:cs typeface="나눔고딕코딩"/>
+                <a:latin typeface="D2Coding"/>
+                <a:ea typeface="D2Coding"/>
+                <a:cs typeface="D2Coding"/>
               </a:rPr>
               <a:t>-- NOT: 조건 부정</a:t>
             </a:r>
@@ -4635,9 +4635,9 @@
                 <a:solidFill>
                   <a:srgbClr val="E6EAF2"/>
                 </a:solidFill>
-                <a:latin typeface="나눔고딕코딩"/>
-                <a:ea typeface="나눔고딕코딩"/>
-                <a:cs typeface="나눔고딕코딩"/>
+                <a:latin typeface="D2Coding"/>
+                <a:ea typeface="D2Coding"/>
+                <a:cs typeface="D2Coding"/>
               </a:rPr>
               <a:t>SELECT name FROM customers WHERE NOT grade = 'SILVER';</a:t>
             </a:r>
@@ -4653,9 +4653,9 @@
                 <a:solidFill>
                   <a:srgbClr val="E6EAF2"/>
                 </a:solidFill>
-                <a:latin typeface="나눔고딕코딩"/>
-                <a:ea typeface="나눔고딕코딩"/>
-                <a:cs typeface="나눔고딕코딩"/>
+                <a:latin typeface="D2Coding"/>
+                <a:ea typeface="D2Coding"/>
+                <a:cs typeface="D2Coding"/>
               </a:rPr>
               <a:t>SELECT name FROM products  WHERE category NOT IN ('가전','식품');</a:t>
             </a:r>
@@ -6276,9 +6276,9 @@
                 <a:solidFill>
                   <a:srgbClr val="7A869C"/>
                 </a:solidFill>
-                <a:latin typeface="나눔고딕코딩"/>
-                <a:ea typeface="나눔고딕코딩"/>
-                <a:cs typeface="나눔고딕코딩"/>
+                <a:latin typeface="D2Coding"/>
+                <a:ea typeface="D2Coding"/>
+                <a:cs typeface="D2Coding"/>
               </a:rPr>
               <a:t>1</a:t>
             </a:r>
@@ -6294,9 +6294,9 @@
                 <a:solidFill>
                   <a:srgbClr val="7A869C"/>
                 </a:solidFill>
-                <a:latin typeface="나눔고딕코딩"/>
-                <a:ea typeface="나눔고딕코딩"/>
-                <a:cs typeface="나눔고딕코딩"/>
+                <a:latin typeface="D2Coding"/>
+                <a:ea typeface="D2Coding"/>
+                <a:cs typeface="D2Coding"/>
               </a:rPr>
               <a:t>2</a:t>
             </a:r>
@@ -6312,9 +6312,9 @@
                 <a:solidFill>
                   <a:srgbClr val="7A869C"/>
                 </a:solidFill>
-                <a:latin typeface="나눔고딕코딩"/>
-                <a:ea typeface="나눔고딕코딩"/>
-                <a:cs typeface="나눔고딕코딩"/>
+                <a:latin typeface="D2Coding"/>
+                <a:ea typeface="D2Coding"/>
+                <a:cs typeface="D2Coding"/>
               </a:rPr>
               <a:t>3</a:t>
             </a:r>
@@ -6330,9 +6330,9 @@
                 <a:solidFill>
                   <a:srgbClr val="7A869C"/>
                 </a:solidFill>
-                <a:latin typeface="나눔고딕코딩"/>
-                <a:ea typeface="나눔고딕코딩"/>
-                <a:cs typeface="나눔고딕코딩"/>
+                <a:latin typeface="D2Coding"/>
+                <a:ea typeface="D2Coding"/>
+                <a:cs typeface="D2Coding"/>
               </a:rPr>
               <a:t>4</a:t>
             </a:r>
@@ -6348,9 +6348,9 @@
                 <a:solidFill>
                   <a:srgbClr val="7A869C"/>
                 </a:solidFill>
-                <a:latin typeface="나눔고딕코딩"/>
-                <a:ea typeface="나눔고딕코딩"/>
-                <a:cs typeface="나눔고딕코딩"/>
+                <a:latin typeface="D2Coding"/>
+                <a:ea typeface="D2Coding"/>
+                <a:cs typeface="D2Coding"/>
               </a:rPr>
               <a:t>5</a:t>
             </a:r>
@@ -6366,9 +6366,9 @@
                 <a:solidFill>
                   <a:srgbClr val="7A869C"/>
                 </a:solidFill>
-                <a:latin typeface="나눔고딕코딩"/>
-                <a:ea typeface="나눔고딕코딩"/>
-                <a:cs typeface="나눔고딕코딩"/>
+                <a:latin typeface="D2Coding"/>
+                <a:ea typeface="D2Coding"/>
+                <a:cs typeface="D2Coding"/>
               </a:rPr>
               <a:t>6</a:t>
             </a:r>
@@ -6407,9 +6407,9 @@
                 <a:solidFill>
                   <a:srgbClr val="E6EAF2"/>
                 </a:solidFill>
-                <a:latin typeface="나눔고딕코딩"/>
-                <a:ea typeface="나눔고딕코딩"/>
-                <a:cs typeface="나눔고딕코딩"/>
+                <a:latin typeface="D2Coding"/>
+                <a:ea typeface="D2Coding"/>
+                <a:cs typeface="D2Coding"/>
               </a:rPr>
               <a:t>-- 우선순위 주의: 아래 두 결과는 다르다</a:t>
             </a:r>
@@ -6425,9 +6425,9 @@
                 <a:solidFill>
                   <a:srgbClr val="E6EAF2"/>
                 </a:solidFill>
-                <a:latin typeface="나눔고딕코딩"/>
-                <a:ea typeface="나눔고딕코딩"/>
-                <a:cs typeface="나눔고딕코딩"/>
+                <a:latin typeface="D2Coding"/>
+                <a:ea typeface="D2Coding"/>
+                <a:cs typeface="D2Coding"/>
               </a:rPr>
               <a:t>SELECT * FROM customers WHERE grade='VIP' OR grade='GOLD' AND city='서울';</a:t>
             </a:r>
@@ -6443,9 +6443,9 @@
                 <a:solidFill>
                   <a:srgbClr val="E6EAF2"/>
                 </a:solidFill>
-                <a:latin typeface="나눔고딕코딩"/>
-                <a:ea typeface="나눔고딕코딩"/>
-                <a:cs typeface="나눔고딕코딩"/>
+                <a:latin typeface="D2Coding"/>
+                <a:ea typeface="D2Coding"/>
+                <a:cs typeface="D2Coding"/>
               </a:rPr>
               <a:t>--   → grade='VIP' OR (grade='GOLD' AND city='서울')</a:t>
             </a:r>
@@ -6461,9 +6461,9 @@
                 <a:solidFill>
                   <a:srgbClr val="E6EAF2"/>
                 </a:solidFill>
-                <a:latin typeface="나눔고딕코딩"/>
-                <a:ea typeface="나눔고딕코딩"/>
-                <a:cs typeface="나눔고딕코딩"/>
+                <a:latin typeface="D2Coding"/>
+                <a:ea typeface="D2Coding"/>
+                <a:cs typeface="D2Coding"/>
               </a:rPr>
               <a:t/>
             </a:r>
@@ -6479,9 +6479,9 @@
                 <a:solidFill>
                   <a:srgbClr val="E6EAF2"/>
                 </a:solidFill>
-                <a:latin typeface="나눔고딕코딩"/>
-                <a:ea typeface="나눔고딕코딩"/>
-                <a:cs typeface="나눔고딕코딩"/>
+                <a:latin typeface="D2Coding"/>
+                <a:ea typeface="D2Coding"/>
+                <a:cs typeface="D2Coding"/>
               </a:rPr>
               <a:t>SELECT * FROM customers WHERE (grade='VIP' OR grade='GOLD') AND city='서울';</a:t>
             </a:r>
@@ -6497,9 +6497,9 @@
                 <a:solidFill>
                   <a:srgbClr val="E6EAF2"/>
                 </a:solidFill>
-                <a:latin typeface="나눔고딕코딩"/>
-                <a:ea typeface="나눔고딕코딩"/>
-                <a:cs typeface="나눔고딕코딩"/>
+                <a:latin typeface="D2Coding"/>
+                <a:ea typeface="D2Coding"/>
+                <a:cs typeface="D2Coding"/>
               </a:rPr>
               <a:t>--   → 서울에 사는 VIP·GOLD 고객</a:t>
             </a:r>
@@ -7875,9 +7875,9 @@
                 <a:solidFill>
                   <a:srgbClr val="7A869C"/>
                 </a:solidFill>
-                <a:latin typeface="나눔고딕코딩"/>
-                <a:ea typeface="나눔고딕코딩"/>
-                <a:cs typeface="나눔고딕코딩"/>
+                <a:latin typeface="D2Coding"/>
+                <a:ea typeface="D2Coding"/>
+                <a:cs typeface="D2Coding"/>
               </a:rPr>
               <a:t>1</a:t>
             </a:r>
@@ -7893,9 +7893,9 @@
                 <a:solidFill>
                   <a:srgbClr val="7A869C"/>
                 </a:solidFill>
-                <a:latin typeface="나눔고딕코딩"/>
-                <a:ea typeface="나눔고딕코딩"/>
-                <a:cs typeface="나눔고딕코딩"/>
+                <a:latin typeface="D2Coding"/>
+                <a:ea typeface="D2Coding"/>
+                <a:cs typeface="D2Coding"/>
               </a:rPr>
               <a:t>2</a:t>
             </a:r>
@@ -7911,9 +7911,9 @@
                 <a:solidFill>
                   <a:srgbClr val="7A869C"/>
                 </a:solidFill>
-                <a:latin typeface="나눔고딕코딩"/>
-                <a:ea typeface="나눔고딕코딩"/>
-                <a:cs typeface="나눔고딕코딩"/>
+                <a:latin typeface="D2Coding"/>
+                <a:ea typeface="D2Coding"/>
+                <a:cs typeface="D2Coding"/>
               </a:rPr>
               <a:t>3</a:t>
             </a:r>
@@ -7929,9 +7929,9 @@
                 <a:solidFill>
                   <a:srgbClr val="7A869C"/>
                 </a:solidFill>
-                <a:latin typeface="나눔고딕코딩"/>
-                <a:ea typeface="나눔고딕코딩"/>
-                <a:cs typeface="나눔고딕코딩"/>
+                <a:latin typeface="D2Coding"/>
+                <a:ea typeface="D2Coding"/>
+                <a:cs typeface="D2Coding"/>
               </a:rPr>
               <a:t>4</a:t>
             </a:r>
@@ -7947,9 +7947,9 @@
                 <a:solidFill>
                   <a:srgbClr val="7A869C"/>
                 </a:solidFill>
-                <a:latin typeface="나눔고딕코딩"/>
-                <a:ea typeface="나눔고딕코딩"/>
-                <a:cs typeface="나눔고딕코딩"/>
+                <a:latin typeface="D2Coding"/>
+                <a:ea typeface="D2Coding"/>
+                <a:cs typeface="D2Coding"/>
               </a:rPr>
               <a:t>5</a:t>
             </a:r>
@@ -7965,9 +7965,9 @@
                 <a:solidFill>
                   <a:srgbClr val="7A869C"/>
                 </a:solidFill>
-                <a:latin typeface="나눔고딕코딩"/>
-                <a:ea typeface="나눔고딕코딩"/>
-                <a:cs typeface="나눔고딕코딩"/>
+                <a:latin typeface="D2Coding"/>
+                <a:ea typeface="D2Coding"/>
+                <a:cs typeface="D2Coding"/>
               </a:rPr>
               <a:t>6</a:t>
             </a:r>
@@ -7983,9 +7983,9 @@
                 <a:solidFill>
                   <a:srgbClr val="7A869C"/>
                 </a:solidFill>
-                <a:latin typeface="나눔고딕코딩"/>
-                <a:ea typeface="나눔고딕코딩"/>
-                <a:cs typeface="나눔고딕코딩"/>
+                <a:latin typeface="D2Coding"/>
+                <a:ea typeface="D2Coding"/>
+                <a:cs typeface="D2Coding"/>
               </a:rPr>
               <a:t>7</a:t>
             </a:r>
@@ -8001,9 +8001,9 @@
                 <a:solidFill>
                   <a:srgbClr val="7A869C"/>
                 </a:solidFill>
-                <a:latin typeface="나눔고딕코딩"/>
-                <a:ea typeface="나눔고딕코딩"/>
-                <a:cs typeface="나눔고딕코딩"/>
+                <a:latin typeface="D2Coding"/>
+                <a:ea typeface="D2Coding"/>
+                <a:cs typeface="D2Coding"/>
               </a:rPr>
               <a:t>8</a:t>
             </a:r>
@@ -8019,9 +8019,9 @@
                 <a:solidFill>
                   <a:srgbClr val="7A869C"/>
                 </a:solidFill>
-                <a:latin typeface="나눔고딕코딩"/>
-                <a:ea typeface="나눔고딕코딩"/>
-                <a:cs typeface="나눔고딕코딩"/>
+                <a:latin typeface="D2Coding"/>
+                <a:ea typeface="D2Coding"/>
+                <a:cs typeface="D2Coding"/>
               </a:rPr>
               <a:t>9</a:t>
             </a:r>
@@ -8037,9 +8037,9 @@
                 <a:solidFill>
                   <a:srgbClr val="7A869C"/>
                 </a:solidFill>
-                <a:latin typeface="나눔고딕코딩"/>
-                <a:ea typeface="나눔고딕코딩"/>
-                <a:cs typeface="나눔고딕코딩"/>
+                <a:latin typeface="D2Coding"/>
+                <a:ea typeface="D2Coding"/>
+                <a:cs typeface="D2Coding"/>
               </a:rPr>
               <a:t>10</a:t>
             </a:r>
@@ -8055,9 +8055,9 @@
                 <a:solidFill>
                   <a:srgbClr val="7A869C"/>
                 </a:solidFill>
-                <a:latin typeface="나눔고딕코딩"/>
-                <a:ea typeface="나눔고딕코딩"/>
-                <a:cs typeface="나눔고딕코딩"/>
+                <a:latin typeface="D2Coding"/>
+                <a:ea typeface="D2Coding"/>
+                <a:cs typeface="D2Coding"/>
               </a:rPr>
               <a:t>11</a:t>
             </a:r>
@@ -8073,9 +8073,9 @@
                 <a:solidFill>
                   <a:srgbClr val="7A869C"/>
                 </a:solidFill>
-                <a:latin typeface="나눔고딕코딩"/>
-                <a:ea typeface="나눔고딕코딩"/>
-                <a:cs typeface="나눔고딕코딩"/>
+                <a:latin typeface="D2Coding"/>
+                <a:ea typeface="D2Coding"/>
+                <a:cs typeface="D2Coding"/>
               </a:rPr>
               <a:t>12</a:t>
             </a:r>
@@ -8091,9 +8091,9 @@
                 <a:solidFill>
                   <a:srgbClr val="7A869C"/>
                 </a:solidFill>
-                <a:latin typeface="나눔고딕코딩"/>
-                <a:ea typeface="나눔고딕코딩"/>
-                <a:cs typeface="나눔고딕코딩"/>
+                <a:latin typeface="D2Coding"/>
+                <a:ea typeface="D2Coding"/>
+                <a:cs typeface="D2Coding"/>
               </a:rPr>
               <a:t>13</a:t>
             </a:r>
@@ -8109,9 +8109,9 @@
                 <a:solidFill>
                   <a:srgbClr val="7A869C"/>
                 </a:solidFill>
-                <a:latin typeface="나눔고딕코딩"/>
-                <a:ea typeface="나눔고딕코딩"/>
-                <a:cs typeface="나눔고딕코딩"/>
+                <a:latin typeface="D2Coding"/>
+                <a:ea typeface="D2Coding"/>
+                <a:cs typeface="D2Coding"/>
               </a:rPr>
               <a:t>14</a:t>
             </a:r>
@@ -8150,9 +8150,9 @@
                 <a:solidFill>
                   <a:srgbClr val="E6EAF2"/>
                 </a:solidFill>
-                <a:latin typeface="나눔고딕코딩"/>
-                <a:ea typeface="나눔고딕코딩"/>
-                <a:cs typeface="나눔고딕코딩"/>
+                <a:latin typeface="D2Coding"/>
+                <a:ea typeface="D2Coding"/>
+                <a:cs typeface="D2Coding"/>
               </a:rPr>
               <a:t>-- BETWEEN은 양쪽 경계를 포함한다 (&gt;= AND &lt;=)</a:t>
             </a:r>
@@ -8168,9 +8168,9 @@
                 <a:solidFill>
                   <a:srgbClr val="E6EAF2"/>
                 </a:solidFill>
-                <a:latin typeface="나눔고딕코딩"/>
-                <a:ea typeface="나눔고딕코딩"/>
-                <a:cs typeface="나눔고딕코딩"/>
+                <a:latin typeface="D2Coding"/>
+                <a:ea typeface="D2Coding"/>
+                <a:cs typeface="D2Coding"/>
               </a:rPr>
               <a:t>SELECT name, price FROM products WHERE price BETWEEN 10000 AND 20000;</a:t>
             </a:r>
@@ -8186,9 +8186,9 @@
                 <a:solidFill>
                   <a:srgbClr val="E6EAF2"/>
                 </a:solidFill>
-                <a:latin typeface="나눔고딕코딩"/>
-                <a:ea typeface="나눔고딕코딩"/>
-                <a:cs typeface="나눔고딕코딩"/>
+                <a:latin typeface="D2Coding"/>
+                <a:ea typeface="D2Coding"/>
+                <a:cs typeface="D2Coding"/>
               </a:rPr>
               <a:t>--  결과: 유기농 원두 500g, 곡물 시리얼 세트, 천연 세탁세제</a:t>
             </a:r>
@@ -8204,9 +8204,9 @@
                 <a:solidFill>
                   <a:srgbClr val="E6EAF2"/>
                 </a:solidFill>
-                <a:latin typeface="나눔고딕코딩"/>
-                <a:ea typeface="나눔고딕코딩"/>
-                <a:cs typeface="나눔고딕코딩"/>
+                <a:latin typeface="D2Coding"/>
+                <a:ea typeface="D2Coding"/>
+                <a:cs typeface="D2Coding"/>
               </a:rPr>
               <a:t/>
             </a:r>
@@ -8222,9 +8222,9 @@
                 <a:solidFill>
                   <a:srgbClr val="E6EAF2"/>
                 </a:solidFill>
-                <a:latin typeface="나눔고딕코딩"/>
-                <a:ea typeface="나눔고딕코딩"/>
-                <a:cs typeface="나눔고딕코딩"/>
+                <a:latin typeface="D2Coding"/>
+                <a:ea typeface="D2Coding"/>
+                <a:cs typeface="D2Coding"/>
               </a:rPr>
               <a:t>-- 날짜에도 사용 가능 — 2024년에 가입한 고객</a:t>
             </a:r>
@@ -8240,9 +8240,9 @@
                 <a:solidFill>
                   <a:srgbClr val="E6EAF2"/>
                 </a:solidFill>
-                <a:latin typeface="나눔고딕코딩"/>
-                <a:ea typeface="나눔고딕코딩"/>
-                <a:cs typeface="나눔고딕코딩"/>
+                <a:latin typeface="D2Coding"/>
+                <a:ea typeface="D2Coding"/>
+                <a:cs typeface="D2Coding"/>
               </a:rPr>
               <a:t>SELECT name, joined_date FROM customers</a:t>
             </a:r>
@@ -8258,9 +8258,9 @@
                 <a:solidFill>
                   <a:srgbClr val="E6EAF2"/>
                 </a:solidFill>
-                <a:latin typeface="나눔고딕코딩"/>
-                <a:ea typeface="나눔고딕코딩"/>
-                <a:cs typeface="나눔고딕코딩"/>
+                <a:latin typeface="D2Coding"/>
+                <a:ea typeface="D2Coding"/>
+                <a:cs typeface="D2Coding"/>
               </a:rPr>
               <a:t>WHERE  joined_date BETWEEN '2024-01-01' AND '2024-12-31';</a:t>
             </a:r>
@@ -8276,9 +8276,9 @@
                 <a:solidFill>
                   <a:srgbClr val="E6EAF2"/>
                 </a:solidFill>
-                <a:latin typeface="나눔고딕코딩"/>
-                <a:ea typeface="나눔고딕코딩"/>
-                <a:cs typeface="나눔고딕코딩"/>
+                <a:latin typeface="D2Coding"/>
+                <a:ea typeface="D2Coding"/>
+                <a:cs typeface="D2Coding"/>
               </a:rPr>
               <a:t>-- 결과: 한가람, 오세영, 장민혁</a:t>
             </a:r>
@@ -8294,9 +8294,9 @@
                 <a:solidFill>
                   <a:srgbClr val="E6EAF2"/>
                 </a:solidFill>
-                <a:latin typeface="나눔고딕코딩"/>
-                <a:ea typeface="나눔고딕코딩"/>
-                <a:cs typeface="나눔고딕코딩"/>
+                <a:latin typeface="D2Coding"/>
+                <a:ea typeface="D2Coding"/>
+                <a:cs typeface="D2Coding"/>
               </a:rPr>
               <a:t/>
             </a:r>
@@ -8312,9 +8312,9 @@
                 <a:solidFill>
                   <a:srgbClr val="E6EAF2"/>
                 </a:solidFill>
-                <a:latin typeface="나눔고딕코딩"/>
-                <a:ea typeface="나눔고딕코딩"/>
-                <a:cs typeface="나눔고딕코딩"/>
+                <a:latin typeface="D2Coding"/>
+                <a:ea typeface="D2Coding"/>
+                <a:cs typeface="D2Coding"/>
               </a:rPr>
               <a:t>-- NOT BETWEEN</a:t>
             </a:r>
@@ -8330,9 +8330,9 @@
                 <a:solidFill>
                   <a:srgbClr val="E6EAF2"/>
                 </a:solidFill>
-                <a:latin typeface="나눔고딕코딩"/>
-                <a:ea typeface="나눔고딕코딩"/>
-                <a:cs typeface="나눔고딕코딩"/>
+                <a:latin typeface="D2Coding"/>
+                <a:ea typeface="D2Coding"/>
+                <a:cs typeface="D2Coding"/>
               </a:rPr>
               <a:t>SELECT name FROM products WHERE price NOT BETWEEN 5000 AND 50000;</a:t>
             </a:r>
@@ -8348,9 +8348,9 @@
                 <a:solidFill>
                   <a:srgbClr val="E6EAF2"/>
                 </a:solidFill>
-                <a:latin typeface="나눔고딕코딩"/>
-                <a:ea typeface="나눔고딕코딩"/>
-                <a:cs typeface="나눔고딕코딩"/>
+                <a:latin typeface="D2Coding"/>
+                <a:ea typeface="D2Coding"/>
+                <a:cs typeface="D2Coding"/>
               </a:rPr>
               <a:t/>
             </a:r>
@@ -8366,9 +8366,9 @@
                 <a:solidFill>
                   <a:srgbClr val="E6EAF2"/>
                 </a:solidFill>
-                <a:latin typeface="나눔고딕코딩"/>
-                <a:ea typeface="나눔고딕코딩"/>
-                <a:cs typeface="나눔고딕코딩"/>
+                <a:latin typeface="D2Coding"/>
+                <a:ea typeface="D2Coding"/>
+                <a:cs typeface="D2Coding"/>
               </a:rPr>
               <a:t>-- IN: 여러 값 중 하나</a:t>
             </a:r>
@@ -8384,9 +8384,9 @@
                 <a:solidFill>
                   <a:srgbClr val="E6EAF2"/>
                 </a:solidFill>
-                <a:latin typeface="나눔고딕코딩"/>
-                <a:ea typeface="나눔고딕코딩"/>
-                <a:cs typeface="나눔고딕코딩"/>
+                <a:latin typeface="D2Coding"/>
+                <a:ea typeface="D2Coding"/>
+                <a:cs typeface="D2Coding"/>
               </a:rPr>
               <a:t>SELECT name, category FROM products WHERE category IN ('가전','문구');</a:t>
             </a:r>
@@ -12420,9 +12420,9 @@
                 <a:solidFill>
                   <a:srgbClr val="7A869C"/>
                 </a:solidFill>
-                <a:latin typeface="나눔고딕코딩"/>
-                <a:ea typeface="나눔고딕코딩"/>
-                <a:cs typeface="나눔고딕코딩"/>
+                <a:latin typeface="D2Coding"/>
+                <a:ea typeface="D2Coding"/>
+                <a:cs typeface="D2Coding"/>
               </a:rPr>
               <a:t>1</a:t>
             </a:r>
@@ -12438,9 +12438,9 @@
                 <a:solidFill>
                   <a:srgbClr val="7A869C"/>
                 </a:solidFill>
-                <a:latin typeface="나눔고딕코딩"/>
-                <a:ea typeface="나눔고딕코딩"/>
-                <a:cs typeface="나눔고딕코딩"/>
+                <a:latin typeface="D2Coding"/>
+                <a:ea typeface="D2Coding"/>
+                <a:cs typeface="D2Coding"/>
               </a:rPr>
               <a:t>2</a:t>
             </a:r>
@@ -12456,9 +12456,9 @@
                 <a:solidFill>
                   <a:srgbClr val="7A869C"/>
                 </a:solidFill>
-                <a:latin typeface="나눔고딕코딩"/>
-                <a:ea typeface="나눔고딕코딩"/>
-                <a:cs typeface="나눔고딕코딩"/>
+                <a:latin typeface="D2Coding"/>
+                <a:ea typeface="D2Coding"/>
+                <a:cs typeface="D2Coding"/>
               </a:rPr>
               <a:t>3</a:t>
             </a:r>
@@ -12474,9 +12474,9 @@
                 <a:solidFill>
                   <a:srgbClr val="7A869C"/>
                 </a:solidFill>
-                <a:latin typeface="나눔고딕코딩"/>
-                <a:ea typeface="나눔고딕코딩"/>
-                <a:cs typeface="나눔고딕코딩"/>
+                <a:latin typeface="D2Coding"/>
+                <a:ea typeface="D2Coding"/>
+                <a:cs typeface="D2Coding"/>
               </a:rPr>
               <a:t>4</a:t>
             </a:r>
@@ -12492,9 +12492,9 @@
                 <a:solidFill>
                   <a:srgbClr val="7A869C"/>
                 </a:solidFill>
-                <a:latin typeface="나눔고딕코딩"/>
-                <a:ea typeface="나눔고딕코딩"/>
-                <a:cs typeface="나눔고딕코딩"/>
+                <a:latin typeface="D2Coding"/>
+                <a:ea typeface="D2Coding"/>
+                <a:cs typeface="D2Coding"/>
               </a:rPr>
               <a:t>5</a:t>
             </a:r>
@@ -12510,9 +12510,9 @@
                 <a:solidFill>
                   <a:srgbClr val="7A869C"/>
                 </a:solidFill>
-                <a:latin typeface="나눔고딕코딩"/>
-                <a:ea typeface="나눔고딕코딩"/>
-                <a:cs typeface="나눔고딕코딩"/>
+                <a:latin typeface="D2Coding"/>
+                <a:ea typeface="D2Coding"/>
+                <a:cs typeface="D2Coding"/>
               </a:rPr>
               <a:t>6</a:t>
             </a:r>
@@ -12528,9 +12528,9 @@
                 <a:solidFill>
                   <a:srgbClr val="7A869C"/>
                 </a:solidFill>
-                <a:latin typeface="나눔고딕코딩"/>
-                <a:ea typeface="나눔고딕코딩"/>
-                <a:cs typeface="나눔고딕코딩"/>
+                <a:latin typeface="D2Coding"/>
+                <a:ea typeface="D2Coding"/>
+                <a:cs typeface="D2Coding"/>
               </a:rPr>
               <a:t>7</a:t>
             </a:r>
@@ -12546,9 +12546,9 @@
                 <a:solidFill>
                   <a:srgbClr val="7A869C"/>
                 </a:solidFill>
-                <a:latin typeface="나눔고딕코딩"/>
-                <a:ea typeface="나눔고딕코딩"/>
-                <a:cs typeface="나눔고딕코딩"/>
+                <a:latin typeface="D2Coding"/>
+                <a:ea typeface="D2Coding"/>
+                <a:cs typeface="D2Coding"/>
               </a:rPr>
               <a:t>8</a:t>
             </a:r>
@@ -12564,9 +12564,9 @@
                 <a:solidFill>
                   <a:srgbClr val="7A869C"/>
                 </a:solidFill>
-                <a:latin typeface="나눔고딕코딩"/>
-                <a:ea typeface="나눔고딕코딩"/>
-                <a:cs typeface="나눔고딕코딩"/>
+                <a:latin typeface="D2Coding"/>
+                <a:ea typeface="D2Coding"/>
+                <a:cs typeface="D2Coding"/>
               </a:rPr>
               <a:t>9</a:t>
             </a:r>
@@ -12582,9 +12582,9 @@
                 <a:solidFill>
                   <a:srgbClr val="7A869C"/>
                 </a:solidFill>
-                <a:latin typeface="나눔고딕코딩"/>
-                <a:ea typeface="나눔고딕코딩"/>
-                <a:cs typeface="나눔고딕코딩"/>
+                <a:latin typeface="D2Coding"/>
+                <a:ea typeface="D2Coding"/>
+                <a:cs typeface="D2Coding"/>
               </a:rPr>
               <a:t>10</a:t>
             </a:r>
@@ -12600,9 +12600,9 @@
                 <a:solidFill>
                   <a:srgbClr val="7A869C"/>
                 </a:solidFill>
-                <a:latin typeface="나눔고딕코딩"/>
-                <a:ea typeface="나눔고딕코딩"/>
-                <a:cs typeface="나눔고딕코딩"/>
+                <a:latin typeface="D2Coding"/>
+                <a:ea typeface="D2Coding"/>
+                <a:cs typeface="D2Coding"/>
               </a:rPr>
               <a:t>11</a:t>
             </a:r>
@@ -12618,9 +12618,9 @@
                 <a:solidFill>
                   <a:srgbClr val="7A869C"/>
                 </a:solidFill>
-                <a:latin typeface="나눔고딕코딩"/>
-                <a:ea typeface="나눔고딕코딩"/>
-                <a:cs typeface="나눔고딕코딩"/>
+                <a:latin typeface="D2Coding"/>
+                <a:ea typeface="D2Coding"/>
+                <a:cs typeface="D2Coding"/>
               </a:rPr>
               <a:t>12</a:t>
             </a:r>
@@ -12659,9 +12659,9 @@
                 <a:solidFill>
                   <a:srgbClr val="E6EAF2"/>
                 </a:solidFill>
-                <a:latin typeface="나눔고딕코딩"/>
-                <a:ea typeface="나눔고딕코딩"/>
-                <a:cs typeface="나눔고딕코딩"/>
+                <a:latin typeface="D2Coding"/>
+                <a:ea typeface="D2Coding"/>
+                <a:cs typeface="D2Coding"/>
               </a:rPr>
               <a:t>SELECT name FROM customers WHERE name LIKE '김%';</a:t>
             </a:r>
@@ -12677,9 +12677,9 @@
                 <a:solidFill>
                   <a:srgbClr val="E6EAF2"/>
                 </a:solidFill>
-                <a:latin typeface="나눔고딕코딩"/>
-                <a:ea typeface="나눔고딕코딩"/>
-                <a:cs typeface="나눔고딕코딩"/>
+                <a:latin typeface="D2Coding"/>
+                <a:ea typeface="D2Coding"/>
+                <a:cs typeface="D2Coding"/>
               </a:rPr>
               <a:t>-- 결과: 김도현</a:t>
             </a:r>
@@ -12695,9 +12695,9 @@
                 <a:solidFill>
                   <a:srgbClr val="E6EAF2"/>
                 </a:solidFill>
-                <a:latin typeface="나눔고딕코딩"/>
-                <a:ea typeface="나눔고딕코딩"/>
-                <a:cs typeface="나눔고딕코딩"/>
+                <a:latin typeface="D2Coding"/>
+                <a:ea typeface="D2Coding"/>
+                <a:cs typeface="D2Coding"/>
               </a:rPr>
               <a:t/>
             </a:r>
@@ -12713,9 +12713,9 @@
                 <a:solidFill>
                   <a:srgbClr val="E6EAF2"/>
                 </a:solidFill>
-                <a:latin typeface="나눔고딕코딩"/>
-                <a:ea typeface="나눔고딕코딩"/>
-                <a:cs typeface="나눔고딕코딩"/>
+                <a:latin typeface="D2Coding"/>
+                <a:ea typeface="D2Coding"/>
+                <a:cs typeface="D2Coding"/>
               </a:rPr>
               <a:t>SELECT name FROM customers WHERE name LIKE '%연';</a:t>
             </a:r>
@@ -12731,9 +12731,9 @@
                 <a:solidFill>
                   <a:srgbClr val="E6EAF2"/>
                 </a:solidFill>
-                <a:latin typeface="나눔고딕코딩"/>
-                <a:ea typeface="나눔고딕코딩"/>
-                <a:cs typeface="나눔고딕코딩"/>
+                <a:latin typeface="D2Coding"/>
+                <a:ea typeface="D2Coding"/>
+                <a:cs typeface="D2Coding"/>
               </a:rPr>
               <a:t>-- 결과: 박서연</a:t>
             </a:r>
@@ -12749,9 +12749,9 @@
                 <a:solidFill>
                   <a:srgbClr val="E6EAF2"/>
                 </a:solidFill>
-                <a:latin typeface="나눔고딕코딩"/>
-                <a:ea typeface="나눔고딕코딩"/>
-                <a:cs typeface="나눔고딕코딩"/>
+                <a:latin typeface="D2Coding"/>
+                <a:ea typeface="D2Coding"/>
+                <a:cs typeface="D2Coding"/>
               </a:rPr>
               <a:t/>
             </a:r>
@@ -12767,9 +12767,9 @@
                 <a:solidFill>
                   <a:srgbClr val="E6EAF2"/>
                 </a:solidFill>
-                <a:latin typeface="나눔고딕코딩"/>
-                <a:ea typeface="나눔고딕코딩"/>
-                <a:cs typeface="나눔고딕코딩"/>
+                <a:latin typeface="D2Coding"/>
+                <a:ea typeface="D2Coding"/>
+                <a:cs typeface="D2Coding"/>
               </a:rPr>
               <a:t>SELECT name, email FROM customers WHERE email LIKE '%@example.com';</a:t>
             </a:r>
@@ -12785,9 +12785,9 @@
                 <a:solidFill>
                   <a:srgbClr val="E6EAF2"/>
                 </a:solidFill>
-                <a:latin typeface="나눔고딕코딩"/>
-                <a:ea typeface="나눔고딕코딩"/>
-                <a:cs typeface="나눔고딕코딩"/>
+                <a:latin typeface="D2Coding"/>
+                <a:ea typeface="D2Coding"/>
+                <a:cs typeface="D2Coding"/>
               </a:rPr>
               <a:t/>
             </a:r>
@@ -12803,9 +12803,9 @@
                 <a:solidFill>
                   <a:srgbClr val="E6EAF2"/>
                 </a:solidFill>
-                <a:latin typeface="나눔고딕코딩"/>
-                <a:ea typeface="나눔고딕코딩"/>
-                <a:cs typeface="나눔고딕코딩"/>
+                <a:latin typeface="D2Coding"/>
+                <a:ea typeface="D2Coding"/>
+                <a:cs typeface="D2Coding"/>
               </a:rPr>
               <a:t>SELECT name FROM employees WHERE name LIKE '___';</a:t>
             </a:r>
@@ -12821,9 +12821,9 @@
                 <a:solidFill>
                   <a:srgbClr val="E6EAF2"/>
                 </a:solidFill>
-                <a:latin typeface="나눔고딕코딩"/>
-                <a:ea typeface="나눔고딕코딩"/>
-                <a:cs typeface="나눔고딕코딩"/>
+                <a:latin typeface="D2Coding"/>
+                <a:ea typeface="D2Coding"/>
+                <a:cs typeface="D2Coding"/>
               </a:rPr>
               <a:t/>
             </a:r>
@@ -12839,9 +12839,9 @@
                 <a:solidFill>
                   <a:srgbClr val="E6EAF2"/>
                 </a:solidFill>
-                <a:latin typeface="나눔고딕코딩"/>
-                <a:ea typeface="나눔고딕코딩"/>
-                <a:cs typeface="나눔고딕코딩"/>
+                <a:latin typeface="D2Coding"/>
+                <a:ea typeface="D2Coding"/>
+                <a:cs typeface="D2Coding"/>
               </a:rPr>
               <a:t>SELECT name FROM products WHERE name LIKE '%세트%';</a:t>
             </a:r>
@@ -12857,9 +12857,9 @@
                 <a:solidFill>
                   <a:srgbClr val="E6EAF2"/>
                 </a:solidFill>
-                <a:latin typeface="나눔고딕코딩"/>
-                <a:ea typeface="나눔고딕코딩"/>
-                <a:cs typeface="나눔고딕코딩"/>
+                <a:latin typeface="D2Coding"/>
+                <a:ea typeface="D2Coding"/>
+                <a:cs typeface="D2Coding"/>
               </a:rPr>
               <a:t>-- 결과: 곡물 시리얼 세트, 3색 볼펜 세트</a:t>
             </a:r>
@@ -15765,9 +15765,9 @@
                 <a:solidFill>
                   <a:srgbClr val="7A869C"/>
                 </a:solidFill>
-                <a:latin typeface="나눔고딕코딩"/>
-                <a:ea typeface="나눔고딕코딩"/>
-                <a:cs typeface="나눔고딕코딩"/>
+                <a:latin typeface="D2Coding"/>
+                <a:ea typeface="D2Coding"/>
+                <a:cs typeface="D2Coding"/>
               </a:rPr>
               <a:t>1</a:t>
             </a:r>
@@ -15783,9 +15783,9 @@
                 <a:solidFill>
                   <a:srgbClr val="7A869C"/>
                 </a:solidFill>
-                <a:latin typeface="나눔고딕코딩"/>
-                <a:ea typeface="나눔고딕코딩"/>
-                <a:cs typeface="나눔고딕코딩"/>
+                <a:latin typeface="D2Coding"/>
+                <a:ea typeface="D2Coding"/>
+                <a:cs typeface="D2Coding"/>
               </a:rPr>
               <a:t>2</a:t>
             </a:r>
@@ -15801,9 +15801,9 @@
                 <a:solidFill>
                   <a:srgbClr val="7A869C"/>
                 </a:solidFill>
-                <a:latin typeface="나눔고딕코딩"/>
-                <a:ea typeface="나눔고딕코딩"/>
-                <a:cs typeface="나눔고딕코딩"/>
+                <a:latin typeface="D2Coding"/>
+                <a:ea typeface="D2Coding"/>
+                <a:cs typeface="D2Coding"/>
               </a:rPr>
               <a:t>3</a:t>
             </a:r>
@@ -15819,9 +15819,9 @@
                 <a:solidFill>
                   <a:srgbClr val="7A869C"/>
                 </a:solidFill>
-                <a:latin typeface="나눔고딕코딩"/>
-                <a:ea typeface="나눔고딕코딩"/>
-                <a:cs typeface="나눔고딕코딩"/>
+                <a:latin typeface="D2Coding"/>
+                <a:ea typeface="D2Coding"/>
+                <a:cs typeface="D2Coding"/>
               </a:rPr>
               <a:t>4</a:t>
             </a:r>
@@ -15837,9 +15837,9 @@
                 <a:solidFill>
                   <a:srgbClr val="7A869C"/>
                 </a:solidFill>
-                <a:latin typeface="나눔고딕코딩"/>
-                <a:ea typeface="나눔고딕코딩"/>
-                <a:cs typeface="나눔고딕코딩"/>
+                <a:latin typeface="D2Coding"/>
+                <a:ea typeface="D2Coding"/>
+                <a:cs typeface="D2Coding"/>
               </a:rPr>
               <a:t>5</a:t>
             </a:r>
@@ -15855,9 +15855,9 @@
                 <a:solidFill>
                   <a:srgbClr val="7A869C"/>
                 </a:solidFill>
-                <a:latin typeface="나눔고딕코딩"/>
-                <a:ea typeface="나눔고딕코딩"/>
-                <a:cs typeface="나눔고딕코딩"/>
+                <a:latin typeface="D2Coding"/>
+                <a:ea typeface="D2Coding"/>
+                <a:cs typeface="D2Coding"/>
               </a:rPr>
               <a:t>6</a:t>
             </a:r>
@@ -15896,9 +15896,9 @@
                 <a:solidFill>
                   <a:srgbClr val="E6EAF2"/>
                 </a:solidFill>
-                <a:latin typeface="나눔고딕코딩"/>
-                <a:ea typeface="나눔고딕코딩"/>
-                <a:cs typeface="나눔고딕코딩"/>
+                <a:latin typeface="D2Coding"/>
+                <a:ea typeface="D2Coding"/>
+                <a:cs typeface="D2Coding"/>
               </a:rPr>
               <a:t>-- 잘못된 방법 — 결과가 항상 비어 있다</a:t>
             </a:r>
@@ -15914,9 +15914,9 @@
                 <a:solidFill>
                   <a:srgbClr val="E6EAF2"/>
                 </a:solidFill>
-                <a:latin typeface="나눔고딕코딩"/>
-                <a:ea typeface="나눔고딕코딩"/>
-                <a:cs typeface="나눔고딕코딩"/>
+                <a:latin typeface="D2Coding"/>
+                <a:ea typeface="D2Coding"/>
+                <a:cs typeface="D2Coding"/>
               </a:rPr>
               <a:t>SELECT order_id FROM orders WHERE emp_id = NULL;    -- (X)</a:t>
             </a:r>
@@ -15932,9 +15932,9 @@
                 <a:solidFill>
                   <a:srgbClr val="E6EAF2"/>
                 </a:solidFill>
-                <a:latin typeface="나눔고딕코딩"/>
-                <a:ea typeface="나눔고딕코딩"/>
-                <a:cs typeface="나눔고딕코딩"/>
+                <a:latin typeface="D2Coding"/>
+                <a:ea typeface="D2Coding"/>
+                <a:cs typeface="D2Coding"/>
               </a:rPr>
               <a:t/>
             </a:r>
@@ -15950,9 +15950,9 @@
                 <a:solidFill>
                   <a:srgbClr val="E6EAF2"/>
                 </a:solidFill>
-                <a:latin typeface="나눔고딕코딩"/>
-                <a:ea typeface="나눔고딕코딩"/>
-                <a:cs typeface="나눔고딕코딩"/>
+                <a:latin typeface="D2Coding"/>
+                <a:ea typeface="D2Coding"/>
+                <a:cs typeface="D2Coding"/>
               </a:rPr>
               <a:t>-- 올바른 방법</a:t>
             </a:r>
@@ -15968,9 +15968,9 @@
                 <a:solidFill>
                   <a:srgbClr val="E6EAF2"/>
                 </a:solidFill>
-                <a:latin typeface="나눔고딕코딩"/>
-                <a:ea typeface="나눔고딕코딩"/>
-                <a:cs typeface="나눔고딕코딩"/>
+                <a:latin typeface="D2Coding"/>
+                <a:ea typeface="D2Coding"/>
+                <a:cs typeface="D2Coding"/>
               </a:rPr>
               <a:t>SELECT order_id FROM orders WHERE emp_id IS NULL;      -- 온라인 주문 (7건)</a:t>
             </a:r>
@@ -15986,9 +15986,9 @@
                 <a:solidFill>
                   <a:srgbClr val="E6EAF2"/>
                 </a:solidFill>
-                <a:latin typeface="나눔고딕코딩"/>
-                <a:ea typeface="나눔고딕코딩"/>
-                <a:cs typeface="나눔고딕코딩"/>
+                <a:latin typeface="D2Coding"/>
+                <a:ea typeface="D2Coding"/>
+                <a:cs typeface="D2Coding"/>
               </a:rPr>
               <a:t>SELECT order_id FROM orders WHERE emp_id IS NOT NULL;  -- 오프라인 주문</a:t>
             </a:r>
@@ -17680,9 +17680,9 @@
                 <a:solidFill>
                   <a:srgbClr val="7A869C"/>
                 </a:solidFill>
-                <a:latin typeface="나눔고딕코딩"/>
-                <a:ea typeface="나눔고딕코딩"/>
-                <a:cs typeface="나눔고딕코딩"/>
+                <a:latin typeface="D2Coding"/>
+                <a:ea typeface="D2Coding"/>
+                <a:cs typeface="D2Coding"/>
               </a:rPr>
               <a:t>1</a:t>
             </a:r>
@@ -17698,9 +17698,9 @@
                 <a:solidFill>
                   <a:srgbClr val="7A869C"/>
                 </a:solidFill>
-                <a:latin typeface="나눔고딕코딩"/>
-                <a:ea typeface="나눔고딕코딩"/>
-                <a:cs typeface="나눔고딕코딩"/>
+                <a:latin typeface="D2Coding"/>
+                <a:ea typeface="D2Coding"/>
+                <a:cs typeface="D2Coding"/>
               </a:rPr>
               <a:t>2</a:t>
             </a:r>
@@ -17716,9 +17716,9 @@
                 <a:solidFill>
                   <a:srgbClr val="7A869C"/>
                 </a:solidFill>
-                <a:latin typeface="나눔고딕코딩"/>
-                <a:ea typeface="나눔고딕코딩"/>
-                <a:cs typeface="나눔고딕코딩"/>
+                <a:latin typeface="D2Coding"/>
+                <a:ea typeface="D2Coding"/>
+                <a:cs typeface="D2Coding"/>
               </a:rPr>
               <a:t>3</a:t>
             </a:r>
@@ -17734,9 +17734,9 @@
                 <a:solidFill>
                   <a:srgbClr val="7A869C"/>
                 </a:solidFill>
-                <a:latin typeface="나눔고딕코딩"/>
-                <a:ea typeface="나눔고딕코딩"/>
-                <a:cs typeface="나눔고딕코딩"/>
+                <a:latin typeface="D2Coding"/>
+                <a:ea typeface="D2Coding"/>
+                <a:cs typeface="D2Coding"/>
               </a:rPr>
               <a:t>4</a:t>
             </a:r>
@@ -17752,9 +17752,9 @@
                 <a:solidFill>
                   <a:srgbClr val="7A869C"/>
                 </a:solidFill>
-                <a:latin typeface="나눔고딕코딩"/>
-                <a:ea typeface="나눔고딕코딩"/>
-                <a:cs typeface="나눔고딕코딩"/>
+                <a:latin typeface="D2Coding"/>
+                <a:ea typeface="D2Coding"/>
+                <a:cs typeface="D2Coding"/>
               </a:rPr>
               <a:t>5</a:t>
             </a:r>
@@ -17770,9 +17770,9 @@
                 <a:solidFill>
                   <a:srgbClr val="7A869C"/>
                 </a:solidFill>
-                <a:latin typeface="나눔고딕코딩"/>
-                <a:ea typeface="나눔고딕코딩"/>
-                <a:cs typeface="나눔고딕코딩"/>
+                <a:latin typeface="D2Coding"/>
+                <a:ea typeface="D2Coding"/>
+                <a:cs typeface="D2Coding"/>
               </a:rPr>
               <a:t>6</a:t>
             </a:r>
@@ -17788,9 +17788,9 @@
                 <a:solidFill>
                   <a:srgbClr val="7A869C"/>
                 </a:solidFill>
-                <a:latin typeface="나눔고딕코딩"/>
-                <a:ea typeface="나눔고딕코딩"/>
-                <a:cs typeface="나눔고딕코딩"/>
+                <a:latin typeface="D2Coding"/>
+                <a:ea typeface="D2Coding"/>
+                <a:cs typeface="D2Coding"/>
               </a:rPr>
               <a:t>7</a:t>
             </a:r>
@@ -17806,9 +17806,9 @@
                 <a:solidFill>
                   <a:srgbClr val="7A869C"/>
                 </a:solidFill>
-                <a:latin typeface="나눔고딕코딩"/>
-                <a:ea typeface="나눔고딕코딩"/>
-                <a:cs typeface="나눔고딕코딩"/>
+                <a:latin typeface="D2Coding"/>
+                <a:ea typeface="D2Coding"/>
+                <a:cs typeface="D2Coding"/>
               </a:rPr>
               <a:t>8</a:t>
             </a:r>
@@ -17824,9 +17824,9 @@
                 <a:solidFill>
                   <a:srgbClr val="7A869C"/>
                 </a:solidFill>
-                <a:latin typeface="나눔고딕코딩"/>
-                <a:ea typeface="나눔고딕코딩"/>
-                <a:cs typeface="나눔고딕코딩"/>
+                <a:latin typeface="D2Coding"/>
+                <a:ea typeface="D2Coding"/>
+                <a:cs typeface="D2Coding"/>
               </a:rPr>
               <a:t>9</a:t>
             </a:r>
@@ -17842,9 +17842,9 @@
                 <a:solidFill>
                   <a:srgbClr val="7A869C"/>
                 </a:solidFill>
-                <a:latin typeface="나눔고딕코딩"/>
-                <a:ea typeface="나눔고딕코딩"/>
-                <a:cs typeface="나눔고딕코딩"/>
+                <a:latin typeface="D2Coding"/>
+                <a:ea typeface="D2Coding"/>
+                <a:cs typeface="D2Coding"/>
               </a:rPr>
               <a:t>10</a:t>
             </a:r>
@@ -17883,9 +17883,9 @@
                 <a:solidFill>
                   <a:srgbClr val="E6EAF2"/>
                 </a:solidFill>
-                <a:latin typeface="나눔고딕코딩"/>
-                <a:ea typeface="나눔고딕코딩"/>
-                <a:cs typeface="나눔고딕코딩"/>
+                <a:latin typeface="D2Coding"/>
+                <a:ea typeface="D2Coding"/>
+                <a:cs typeface="D2Coding"/>
               </a:rPr>
               <a:t>-- 연봉이 아직 정해지지 않은 직원</a:t>
             </a:r>
@@ -17901,9 +17901,9 @@
                 <a:solidFill>
                   <a:srgbClr val="E6EAF2"/>
                 </a:solidFill>
-                <a:latin typeface="나눔고딕코딩"/>
-                <a:ea typeface="나눔고딕코딩"/>
-                <a:cs typeface="나눔고딕코딩"/>
+                <a:latin typeface="D2Coding"/>
+                <a:ea typeface="D2Coding"/>
+                <a:cs typeface="D2Coding"/>
               </a:rPr>
               <a:t>SELECT name, dept FROM employees WHERE salary IS NULL;</a:t>
             </a:r>
@@ -17919,9 +17919,9 @@
                 <a:solidFill>
                   <a:srgbClr val="E6EAF2"/>
                 </a:solidFill>
-                <a:latin typeface="나눔고딕코딩"/>
-                <a:ea typeface="나눔고딕코딩"/>
-                <a:cs typeface="나눔고딕코딩"/>
+                <a:latin typeface="D2Coding"/>
+                <a:ea typeface="D2Coding"/>
+                <a:cs typeface="D2Coding"/>
               </a:rPr>
               <a:t>-- 결과: 조하늘</a:t>
             </a:r>
@@ -17937,9 +17937,9 @@
                 <a:solidFill>
                   <a:srgbClr val="E6EAF2"/>
                 </a:solidFill>
-                <a:latin typeface="나눔고딕코딩"/>
-                <a:ea typeface="나눔고딕코딩"/>
-                <a:cs typeface="나눔고딕코딩"/>
+                <a:latin typeface="D2Coding"/>
+                <a:ea typeface="D2Coding"/>
+                <a:cs typeface="D2Coding"/>
               </a:rPr>
               <a:t/>
             </a:r>
@@ -17955,9 +17955,9 @@
                 <a:solidFill>
                   <a:srgbClr val="E6EAF2"/>
                 </a:solidFill>
-                <a:latin typeface="나눔고딕코딩"/>
-                <a:ea typeface="나눔고딕코딩"/>
-                <a:cs typeface="나눔고딕코딩"/>
+                <a:latin typeface="D2Coding"/>
+                <a:ea typeface="D2Coding"/>
+                <a:cs typeface="D2Coding"/>
               </a:rPr>
               <a:t>-- NULL과의 산술 연산 결과는 NULL</a:t>
             </a:r>
@@ -17973,9 +17973,9 @@
                 <a:solidFill>
                   <a:srgbClr val="E6EAF2"/>
                 </a:solidFill>
-                <a:latin typeface="나눔고딕코딩"/>
-                <a:ea typeface="나눔고딕코딩"/>
-                <a:cs typeface="나눔고딕코딩"/>
+                <a:latin typeface="D2Coding"/>
+                <a:ea typeface="D2Coding"/>
+                <a:cs typeface="D2Coding"/>
               </a:rPr>
               <a:t>SELECT name, salary, salary + 50 AS 인상후 FROM employees;</a:t>
             </a:r>
@@ -17991,9 +17991,9 @@
                 <a:solidFill>
                   <a:srgbClr val="E6EAF2"/>
                 </a:solidFill>
-                <a:latin typeface="나눔고딕코딩"/>
-                <a:ea typeface="나눔고딕코딩"/>
-                <a:cs typeface="나눔고딕코딩"/>
+                <a:latin typeface="D2Coding"/>
+                <a:ea typeface="D2Coding"/>
+                <a:cs typeface="D2Coding"/>
               </a:rPr>
               <a:t/>
             </a:r>
@@ -18009,9 +18009,9 @@
                 <a:solidFill>
                   <a:srgbClr val="E6EAF2"/>
                 </a:solidFill>
-                <a:latin typeface="나눔고딕코딩"/>
-                <a:ea typeface="나눔고딕코딩"/>
-                <a:cs typeface="나눔고딕코딩"/>
+                <a:latin typeface="D2Coding"/>
+                <a:ea typeface="D2Coding"/>
+                <a:cs typeface="D2Coding"/>
               </a:rPr>
               <a:t>-- NULL을 대체하여 조회</a:t>
             </a:r>
@@ -18027,9 +18027,9 @@
                 <a:solidFill>
                   <a:srgbClr val="E6EAF2"/>
                 </a:solidFill>
-                <a:latin typeface="나눔고딕코딩"/>
-                <a:ea typeface="나눔고딕코딩"/>
-                <a:cs typeface="나눔고딕코딩"/>
+                <a:latin typeface="D2Coding"/>
+                <a:ea typeface="D2Coding"/>
+                <a:cs typeface="D2Coding"/>
               </a:rPr>
               <a:t>SELECT name, IFNULL(salary, 0)   AS 연봉 FROM employees;</a:t>
             </a:r>
@@ -18045,9 +18045,9 @@
                 <a:solidFill>
                   <a:srgbClr val="E6EAF2"/>
                 </a:solidFill>
-                <a:latin typeface="나눔고딕코딩"/>
-                <a:ea typeface="나눔고딕코딩"/>
-                <a:cs typeface="나눔고딕코딩"/>
+                <a:latin typeface="D2Coding"/>
+                <a:ea typeface="D2Coding"/>
+                <a:cs typeface="D2Coding"/>
               </a:rPr>
               <a:t>SELECT name, COALESCE(salary, 0) AS 연봉 FROM employees;  -- 표준 SQL</a:t>
             </a:r>
@@ -21410,9 +21410,9 @@
                 <a:solidFill>
                   <a:srgbClr val="7A869C"/>
                 </a:solidFill>
-                <a:latin typeface="나눔고딕코딩"/>
-                <a:ea typeface="나눔고딕코딩"/>
-                <a:cs typeface="나눔고딕코딩"/>
+                <a:latin typeface="D2Coding"/>
+                <a:ea typeface="D2Coding"/>
+                <a:cs typeface="D2Coding"/>
               </a:rPr>
               <a:t>1</a:t>
             </a:r>
@@ -21428,9 +21428,9 @@
                 <a:solidFill>
                   <a:srgbClr val="7A869C"/>
                 </a:solidFill>
-                <a:latin typeface="나눔고딕코딩"/>
-                <a:ea typeface="나눔고딕코딩"/>
-                <a:cs typeface="나눔고딕코딩"/>
+                <a:latin typeface="D2Coding"/>
+                <a:ea typeface="D2Coding"/>
+                <a:cs typeface="D2Coding"/>
               </a:rPr>
               <a:t>2</a:t>
             </a:r>
@@ -21446,9 +21446,9 @@
                 <a:solidFill>
                   <a:srgbClr val="7A869C"/>
                 </a:solidFill>
-                <a:latin typeface="나눔고딕코딩"/>
-                <a:ea typeface="나눔고딕코딩"/>
-                <a:cs typeface="나눔고딕코딩"/>
+                <a:latin typeface="D2Coding"/>
+                <a:ea typeface="D2Coding"/>
+                <a:cs typeface="D2Coding"/>
               </a:rPr>
               <a:t>3</a:t>
             </a:r>
@@ -21464,9 +21464,9 @@
                 <a:solidFill>
                   <a:srgbClr val="7A869C"/>
                 </a:solidFill>
-                <a:latin typeface="나눔고딕코딩"/>
-                <a:ea typeface="나눔고딕코딩"/>
-                <a:cs typeface="나눔고딕코딩"/>
+                <a:latin typeface="D2Coding"/>
+                <a:ea typeface="D2Coding"/>
+                <a:cs typeface="D2Coding"/>
               </a:rPr>
               <a:t>4</a:t>
             </a:r>
@@ -21482,9 +21482,9 @@
                 <a:solidFill>
                   <a:srgbClr val="7A869C"/>
                 </a:solidFill>
-                <a:latin typeface="나눔고딕코딩"/>
-                <a:ea typeface="나눔고딕코딩"/>
-                <a:cs typeface="나눔고딕코딩"/>
+                <a:latin typeface="D2Coding"/>
+                <a:ea typeface="D2Coding"/>
+                <a:cs typeface="D2Coding"/>
               </a:rPr>
               <a:t>5</a:t>
             </a:r>
@@ -21500,9 +21500,9 @@
                 <a:solidFill>
                   <a:srgbClr val="7A869C"/>
                 </a:solidFill>
-                <a:latin typeface="나눔고딕코딩"/>
-                <a:ea typeface="나눔고딕코딩"/>
-                <a:cs typeface="나눔고딕코딩"/>
+                <a:latin typeface="D2Coding"/>
+                <a:ea typeface="D2Coding"/>
+                <a:cs typeface="D2Coding"/>
               </a:rPr>
               <a:t>6</a:t>
             </a:r>
@@ -21518,9 +21518,9 @@
                 <a:solidFill>
                   <a:srgbClr val="7A869C"/>
                 </a:solidFill>
-                <a:latin typeface="나눔고딕코딩"/>
-                <a:ea typeface="나눔고딕코딩"/>
-                <a:cs typeface="나눔고딕코딩"/>
+                <a:latin typeface="D2Coding"/>
+                <a:ea typeface="D2Coding"/>
+                <a:cs typeface="D2Coding"/>
               </a:rPr>
               <a:t>7</a:t>
             </a:r>
@@ -21536,9 +21536,9 @@
                 <a:solidFill>
                   <a:srgbClr val="7A869C"/>
                 </a:solidFill>
-                <a:latin typeface="나눔고딕코딩"/>
-                <a:ea typeface="나눔고딕코딩"/>
-                <a:cs typeface="나눔고딕코딩"/>
+                <a:latin typeface="D2Coding"/>
+                <a:ea typeface="D2Coding"/>
+                <a:cs typeface="D2Coding"/>
               </a:rPr>
               <a:t>8</a:t>
             </a:r>
@@ -21554,9 +21554,9 @@
                 <a:solidFill>
                   <a:srgbClr val="7A869C"/>
                 </a:solidFill>
-                <a:latin typeface="나눔고딕코딩"/>
-                <a:ea typeface="나눔고딕코딩"/>
-                <a:cs typeface="나눔고딕코딩"/>
+                <a:latin typeface="D2Coding"/>
+                <a:ea typeface="D2Coding"/>
+                <a:cs typeface="D2Coding"/>
               </a:rPr>
               <a:t>9</a:t>
             </a:r>
@@ -21572,9 +21572,9 @@
                 <a:solidFill>
                   <a:srgbClr val="7A869C"/>
                 </a:solidFill>
-                <a:latin typeface="나눔고딕코딩"/>
-                <a:ea typeface="나눔고딕코딩"/>
-                <a:cs typeface="나눔고딕코딩"/>
+                <a:latin typeface="D2Coding"/>
+                <a:ea typeface="D2Coding"/>
+                <a:cs typeface="D2Coding"/>
               </a:rPr>
               <a:t>10</a:t>
             </a:r>
@@ -21613,9 +21613,9 @@
                 <a:solidFill>
                   <a:srgbClr val="E6EAF2"/>
                 </a:solidFill>
-                <a:latin typeface="나눔고딕코딩"/>
-                <a:ea typeface="나눔고딕코딩"/>
-                <a:cs typeface="나눔고딕코딩"/>
+                <a:latin typeface="D2Coding"/>
+                <a:ea typeface="D2Coding"/>
+                <a:cs typeface="D2Coding"/>
               </a:rPr>
               <a:t>-- 오름차순 (ASC는 기본값이므로 생략 가능)</a:t>
             </a:r>
@@ -21631,9 +21631,9 @@
                 <a:solidFill>
                   <a:srgbClr val="E6EAF2"/>
                 </a:solidFill>
-                <a:latin typeface="나눔고딕코딩"/>
-                <a:ea typeface="나눔고딕코딩"/>
-                <a:cs typeface="나눔고딕코딩"/>
+                <a:latin typeface="D2Coding"/>
+                <a:ea typeface="D2Coding"/>
+                <a:cs typeface="D2Coding"/>
               </a:rPr>
               <a:t>SELECT name, price FROM products ORDER BY price ASC;</a:t>
             </a:r>
@@ -21649,9 +21649,9 @@
                 <a:solidFill>
                   <a:srgbClr val="E6EAF2"/>
                 </a:solidFill>
-                <a:latin typeface="나눔고딕코딩"/>
-                <a:ea typeface="나눔고딕코딩"/>
-                <a:cs typeface="나눔고딕코딩"/>
+                <a:latin typeface="D2Coding"/>
+                <a:ea typeface="D2Coding"/>
+                <a:cs typeface="D2Coding"/>
               </a:rPr>
               <a:t/>
             </a:r>
@@ -21667,9 +21667,9 @@
                 <a:solidFill>
                   <a:srgbClr val="E6EAF2"/>
                 </a:solidFill>
-                <a:latin typeface="나눔고딕코딩"/>
-                <a:ea typeface="나눔고딕코딩"/>
-                <a:cs typeface="나눔고딕코딩"/>
+                <a:latin typeface="D2Coding"/>
+                <a:ea typeface="D2Coding"/>
+                <a:cs typeface="D2Coding"/>
               </a:rPr>
               <a:t>-- 내림차순 — 포인트가 많은 고객부터</a:t>
             </a:r>
@@ -21685,9 +21685,9 @@
                 <a:solidFill>
                   <a:srgbClr val="E6EAF2"/>
                 </a:solidFill>
-                <a:latin typeface="나눔고딕코딩"/>
-                <a:ea typeface="나눔고딕코딩"/>
-                <a:cs typeface="나눔고딕코딩"/>
+                <a:latin typeface="D2Coding"/>
+                <a:ea typeface="D2Coding"/>
+                <a:cs typeface="D2Coding"/>
               </a:rPr>
               <a:t>SELECT name, points FROM customers ORDER BY points DESC;</a:t>
             </a:r>
@@ -21703,9 +21703,9 @@
                 <a:solidFill>
                   <a:srgbClr val="E6EAF2"/>
                 </a:solidFill>
-                <a:latin typeface="나눔고딕코딩"/>
-                <a:ea typeface="나눔고딕코딩"/>
-                <a:cs typeface="나눔고딕코딩"/>
+                <a:latin typeface="D2Coding"/>
+                <a:ea typeface="D2Coding"/>
+                <a:cs typeface="D2Coding"/>
               </a:rPr>
               <a:t/>
             </a:r>
@@ -21721,9 +21721,9 @@
                 <a:solidFill>
                   <a:srgbClr val="E6EAF2"/>
                 </a:solidFill>
-                <a:latin typeface="나눔고딕코딩"/>
-                <a:ea typeface="나눔고딕코딩"/>
-                <a:cs typeface="나눔고딕코딩"/>
+                <a:latin typeface="D2Coding"/>
+                <a:ea typeface="D2Coding"/>
+                <a:cs typeface="D2Coding"/>
               </a:rPr>
               <a:t>-- 다중 정렬: 등급 오름차순 → 같은 등급 안에서 포인트 내림차순</a:t>
             </a:r>
@@ -21739,9 +21739,9 @@
                 <a:solidFill>
                   <a:srgbClr val="E6EAF2"/>
                 </a:solidFill>
-                <a:latin typeface="나눔고딕코딩"/>
-                <a:ea typeface="나눔고딕코딩"/>
-                <a:cs typeface="나눔고딕코딩"/>
+                <a:latin typeface="D2Coding"/>
+                <a:ea typeface="D2Coding"/>
+                <a:cs typeface="D2Coding"/>
               </a:rPr>
               <a:t>SELECT name, grade, points</a:t>
             </a:r>
@@ -21757,9 +21757,9 @@
                 <a:solidFill>
                   <a:srgbClr val="E6EAF2"/>
                 </a:solidFill>
-                <a:latin typeface="나눔고딕코딩"/>
-                <a:ea typeface="나눔고딕코딩"/>
-                <a:cs typeface="나눔고딕코딩"/>
+                <a:latin typeface="D2Coding"/>
+                <a:ea typeface="D2Coding"/>
+                <a:cs typeface="D2Coding"/>
               </a:rPr>
               <a:t>FROM   customers</a:t>
             </a:r>
@@ -21775,9 +21775,9 @@
                 <a:solidFill>
                   <a:srgbClr val="E6EAF2"/>
                 </a:solidFill>
-                <a:latin typeface="나눔고딕코딩"/>
-                <a:ea typeface="나눔고딕코딩"/>
-                <a:cs typeface="나눔고딕코딩"/>
+                <a:latin typeface="D2Coding"/>
+                <a:ea typeface="D2Coding"/>
+                <a:cs typeface="D2Coding"/>
               </a:rPr>
               <a:t>ORDER BY grade ASC, points DESC;</a:t>
             </a:r>
@@ -24476,9 +24476,9 @@
                 <a:solidFill>
                   <a:srgbClr val="7A869C"/>
                 </a:solidFill>
-                <a:latin typeface="나눔고딕코딩"/>
-                <a:ea typeface="나눔고딕코딩"/>
-                <a:cs typeface="나눔고딕코딩"/>
+                <a:latin typeface="D2Coding"/>
+                <a:ea typeface="D2Coding"/>
+                <a:cs typeface="D2Coding"/>
               </a:rPr>
               <a:t>1</a:t>
             </a:r>
@@ -24494,9 +24494,9 @@
                 <a:solidFill>
                   <a:srgbClr val="7A869C"/>
                 </a:solidFill>
-                <a:latin typeface="나눔고딕코딩"/>
-                <a:ea typeface="나눔고딕코딩"/>
-                <a:cs typeface="나눔고딕코딩"/>
+                <a:latin typeface="D2Coding"/>
+                <a:ea typeface="D2Coding"/>
+                <a:cs typeface="D2Coding"/>
               </a:rPr>
               <a:t>2</a:t>
             </a:r>
@@ -24512,9 +24512,9 @@
                 <a:solidFill>
                   <a:srgbClr val="7A869C"/>
                 </a:solidFill>
-                <a:latin typeface="나눔고딕코딩"/>
-                <a:ea typeface="나눔고딕코딩"/>
-                <a:cs typeface="나눔고딕코딩"/>
+                <a:latin typeface="D2Coding"/>
+                <a:ea typeface="D2Coding"/>
+                <a:cs typeface="D2Coding"/>
               </a:rPr>
               <a:t>3</a:t>
             </a:r>
@@ -24530,9 +24530,9 @@
                 <a:solidFill>
                   <a:srgbClr val="7A869C"/>
                 </a:solidFill>
-                <a:latin typeface="나눔고딕코딩"/>
-                <a:ea typeface="나눔고딕코딩"/>
-                <a:cs typeface="나눔고딕코딩"/>
+                <a:latin typeface="D2Coding"/>
+                <a:ea typeface="D2Coding"/>
+                <a:cs typeface="D2Coding"/>
               </a:rPr>
               <a:t>4</a:t>
             </a:r>
@@ -24548,9 +24548,9 @@
                 <a:solidFill>
                   <a:srgbClr val="7A869C"/>
                 </a:solidFill>
-                <a:latin typeface="나눔고딕코딩"/>
-                <a:ea typeface="나눔고딕코딩"/>
-                <a:cs typeface="나눔고딕코딩"/>
+                <a:latin typeface="D2Coding"/>
+                <a:ea typeface="D2Coding"/>
+                <a:cs typeface="D2Coding"/>
               </a:rPr>
               <a:t>5</a:t>
             </a:r>
@@ -24566,9 +24566,9 @@
                 <a:solidFill>
                   <a:srgbClr val="7A869C"/>
                 </a:solidFill>
-                <a:latin typeface="나눔고딕코딩"/>
-                <a:ea typeface="나눔고딕코딩"/>
-                <a:cs typeface="나눔고딕코딩"/>
+                <a:latin typeface="D2Coding"/>
+                <a:ea typeface="D2Coding"/>
+                <a:cs typeface="D2Coding"/>
               </a:rPr>
               <a:t>6</a:t>
             </a:r>
@@ -24584,9 +24584,9 @@
                 <a:solidFill>
                   <a:srgbClr val="7A869C"/>
                 </a:solidFill>
-                <a:latin typeface="나눔고딕코딩"/>
-                <a:ea typeface="나눔고딕코딩"/>
-                <a:cs typeface="나눔고딕코딩"/>
+                <a:latin typeface="D2Coding"/>
+                <a:ea typeface="D2Coding"/>
+                <a:cs typeface="D2Coding"/>
               </a:rPr>
               <a:t>7</a:t>
             </a:r>
@@ -24625,9 +24625,9 @@
                 <a:solidFill>
                   <a:srgbClr val="E6EAF2"/>
                 </a:solidFill>
-                <a:latin typeface="나눔고딕코딩"/>
-                <a:ea typeface="나눔고딕코딩"/>
-                <a:cs typeface="나눔고딕코딩"/>
+                <a:latin typeface="D2Coding"/>
+                <a:ea typeface="D2Coding"/>
+                <a:cs typeface="D2Coding"/>
               </a:rPr>
               <a:t>-- 별칭으로 정렬 (ORDER BY는 SELECT 이후 실행되므로 가능)</a:t>
             </a:r>
@@ -24643,9 +24643,9 @@
                 <a:solidFill>
                   <a:srgbClr val="E6EAF2"/>
                 </a:solidFill>
-                <a:latin typeface="나눔고딕코딩"/>
-                <a:ea typeface="나눔고딕코딩"/>
-                <a:cs typeface="나눔고딕코딩"/>
+                <a:latin typeface="D2Coding"/>
+                <a:ea typeface="D2Coding"/>
+                <a:cs typeface="D2Coding"/>
               </a:rPr>
               <a:t>SELECT name, price * 0.9 AS 할인가</a:t>
             </a:r>
@@ -24661,9 +24661,9 @@
                 <a:solidFill>
                   <a:srgbClr val="E6EAF2"/>
                 </a:solidFill>
-                <a:latin typeface="나눔고딕코딩"/>
-                <a:ea typeface="나눔고딕코딩"/>
-                <a:cs typeface="나눔고딕코딩"/>
+                <a:latin typeface="D2Coding"/>
+                <a:ea typeface="D2Coding"/>
+                <a:cs typeface="D2Coding"/>
               </a:rPr>
               <a:t>FROM   products</a:t>
             </a:r>
@@ -24679,9 +24679,9 @@
                 <a:solidFill>
                   <a:srgbClr val="E6EAF2"/>
                 </a:solidFill>
-                <a:latin typeface="나눔고딕코딩"/>
-                <a:ea typeface="나눔고딕코딩"/>
-                <a:cs typeface="나눔고딕코딩"/>
+                <a:latin typeface="D2Coding"/>
+                <a:ea typeface="D2Coding"/>
+                <a:cs typeface="D2Coding"/>
               </a:rPr>
               <a:t>ORDER BY 할인가 DESC;</a:t>
             </a:r>
@@ -24697,9 +24697,9 @@
                 <a:solidFill>
                   <a:srgbClr val="E6EAF2"/>
                 </a:solidFill>
-                <a:latin typeface="나눔고딕코딩"/>
-                <a:ea typeface="나눔고딕코딩"/>
-                <a:cs typeface="나눔고딕코딩"/>
+                <a:latin typeface="D2Coding"/>
+                <a:ea typeface="D2Coding"/>
+                <a:cs typeface="D2Coding"/>
               </a:rPr>
               <a:t/>
             </a:r>
@@ -24715,9 +24715,9 @@
                 <a:solidFill>
                   <a:srgbClr val="E6EAF2"/>
                 </a:solidFill>
-                <a:latin typeface="나눔고딕코딩"/>
-                <a:ea typeface="나눔고딕코딩"/>
-                <a:cs typeface="나눔고딕코딩"/>
+                <a:latin typeface="D2Coding"/>
+                <a:ea typeface="D2Coding"/>
+                <a:cs typeface="D2Coding"/>
               </a:rPr>
               <a:t>-- 컬럼 순번으로 정렬 (2번째 컬럼 기준) — 가독성이 떨어져 권장하지 않음</a:t>
             </a:r>
@@ -24733,9 +24733,9 @@
                 <a:solidFill>
                   <a:srgbClr val="E6EAF2"/>
                 </a:solidFill>
-                <a:latin typeface="나눔고딕코딩"/>
-                <a:ea typeface="나눔고딕코딩"/>
-                <a:cs typeface="나눔고딕코딩"/>
+                <a:latin typeface="D2Coding"/>
+                <a:ea typeface="D2Coding"/>
+                <a:cs typeface="D2Coding"/>
               </a:rPr>
               <a:t>SELECT name, price FROM products ORDER BY 2 DESC;</a:t>
             </a:r>
@@ -25980,9 +25980,9 @@
                 <a:solidFill>
                   <a:srgbClr val="7A869C"/>
                 </a:solidFill>
-                <a:latin typeface="나눔고딕코딩"/>
-                <a:ea typeface="나눔고딕코딩"/>
-                <a:cs typeface="나눔고딕코딩"/>
+                <a:latin typeface="D2Coding"/>
+                <a:ea typeface="D2Coding"/>
+                <a:cs typeface="D2Coding"/>
               </a:rPr>
               <a:t>1</a:t>
             </a:r>
@@ -25998,9 +25998,9 @@
                 <a:solidFill>
                   <a:srgbClr val="7A869C"/>
                 </a:solidFill>
-                <a:latin typeface="나눔고딕코딩"/>
-                <a:ea typeface="나눔고딕코딩"/>
-                <a:cs typeface="나눔고딕코딩"/>
+                <a:latin typeface="D2Coding"/>
+                <a:ea typeface="D2Coding"/>
+                <a:cs typeface="D2Coding"/>
               </a:rPr>
               <a:t>2</a:t>
             </a:r>
@@ -26016,9 +26016,9 @@
                 <a:solidFill>
                   <a:srgbClr val="7A869C"/>
                 </a:solidFill>
-                <a:latin typeface="나눔고딕코딩"/>
-                <a:ea typeface="나눔고딕코딩"/>
-                <a:cs typeface="나눔고딕코딩"/>
+                <a:latin typeface="D2Coding"/>
+                <a:ea typeface="D2Coding"/>
+                <a:cs typeface="D2Coding"/>
               </a:rPr>
               <a:t>3</a:t>
             </a:r>
@@ -26034,9 +26034,9 @@
                 <a:solidFill>
                   <a:srgbClr val="7A869C"/>
                 </a:solidFill>
-                <a:latin typeface="나눔고딕코딩"/>
-                <a:ea typeface="나눔고딕코딩"/>
-                <a:cs typeface="나눔고딕코딩"/>
+                <a:latin typeface="D2Coding"/>
+                <a:ea typeface="D2Coding"/>
+                <a:cs typeface="D2Coding"/>
               </a:rPr>
               <a:t>4</a:t>
             </a:r>
@@ -26052,9 +26052,9 @@
                 <a:solidFill>
                   <a:srgbClr val="7A869C"/>
                 </a:solidFill>
-                <a:latin typeface="나눔고딕코딩"/>
-                <a:ea typeface="나눔고딕코딩"/>
-                <a:cs typeface="나눔고딕코딩"/>
+                <a:latin typeface="D2Coding"/>
+                <a:ea typeface="D2Coding"/>
+                <a:cs typeface="D2Coding"/>
               </a:rPr>
               <a:t>5</a:t>
             </a:r>
@@ -26070,9 +26070,9 @@
                 <a:solidFill>
                   <a:srgbClr val="7A869C"/>
                 </a:solidFill>
-                <a:latin typeface="나눔고딕코딩"/>
-                <a:ea typeface="나눔고딕코딩"/>
-                <a:cs typeface="나눔고딕코딩"/>
+                <a:latin typeface="D2Coding"/>
+                <a:ea typeface="D2Coding"/>
+                <a:cs typeface="D2Coding"/>
               </a:rPr>
               <a:t>6</a:t>
             </a:r>
@@ -26088,9 +26088,9 @@
                 <a:solidFill>
                   <a:srgbClr val="7A869C"/>
                 </a:solidFill>
-                <a:latin typeface="나눔고딕코딩"/>
-                <a:ea typeface="나눔고딕코딩"/>
-                <a:cs typeface="나눔고딕코딩"/>
+                <a:latin typeface="D2Coding"/>
+                <a:ea typeface="D2Coding"/>
+                <a:cs typeface="D2Coding"/>
               </a:rPr>
               <a:t>7</a:t>
             </a:r>
@@ -26106,9 +26106,9 @@
                 <a:solidFill>
                   <a:srgbClr val="7A869C"/>
                 </a:solidFill>
-                <a:latin typeface="나눔고딕코딩"/>
-                <a:ea typeface="나눔고딕코딩"/>
-                <a:cs typeface="나눔고딕코딩"/>
+                <a:latin typeface="D2Coding"/>
+                <a:ea typeface="D2Coding"/>
+                <a:cs typeface="D2Coding"/>
               </a:rPr>
               <a:t>8</a:t>
             </a:r>
@@ -26124,9 +26124,9 @@
                 <a:solidFill>
                   <a:srgbClr val="7A869C"/>
                 </a:solidFill>
-                <a:latin typeface="나눔고딕코딩"/>
-                <a:ea typeface="나눔고딕코딩"/>
-                <a:cs typeface="나눔고딕코딩"/>
+                <a:latin typeface="D2Coding"/>
+                <a:ea typeface="D2Coding"/>
+                <a:cs typeface="D2Coding"/>
               </a:rPr>
               <a:t>9</a:t>
             </a:r>
@@ -26142,9 +26142,9 @@
                 <a:solidFill>
                   <a:srgbClr val="7A869C"/>
                 </a:solidFill>
-                <a:latin typeface="나눔고딕코딩"/>
-                <a:ea typeface="나눔고딕코딩"/>
-                <a:cs typeface="나눔고딕코딩"/>
+                <a:latin typeface="D2Coding"/>
+                <a:ea typeface="D2Coding"/>
+                <a:cs typeface="D2Coding"/>
               </a:rPr>
               <a:t>10</a:t>
             </a:r>
@@ -26160,9 +26160,9 @@
                 <a:solidFill>
                   <a:srgbClr val="7A869C"/>
                 </a:solidFill>
-                <a:latin typeface="나눔고딕코딩"/>
-                <a:ea typeface="나눔고딕코딩"/>
-                <a:cs typeface="나눔고딕코딩"/>
+                <a:latin typeface="D2Coding"/>
+                <a:ea typeface="D2Coding"/>
+                <a:cs typeface="D2Coding"/>
               </a:rPr>
               <a:t>11</a:t>
             </a:r>
@@ -26201,9 +26201,9 @@
                 <a:solidFill>
                   <a:srgbClr val="E6EAF2"/>
                 </a:solidFill>
-                <a:latin typeface="나눔고딕코딩"/>
-                <a:ea typeface="나눔고딕코딩"/>
-                <a:cs typeface="나눔고딕코딩"/>
+                <a:latin typeface="D2Coding"/>
+                <a:ea typeface="D2Coding"/>
+                <a:cs typeface="D2Coding"/>
               </a:rPr>
               <a:t>-- MySQL은 ASC에서 NULL이 가장 앞, DESC에서 가장 뒤에 온다</a:t>
             </a:r>
@@ -26219,9 +26219,9 @@
                 <a:solidFill>
                   <a:srgbClr val="E6EAF2"/>
                 </a:solidFill>
-                <a:latin typeface="나눔고딕코딩"/>
-                <a:ea typeface="나눔고딕코딩"/>
-                <a:cs typeface="나눔고딕코딩"/>
+                <a:latin typeface="D2Coding"/>
+                <a:ea typeface="D2Coding"/>
+                <a:cs typeface="D2Coding"/>
               </a:rPr>
               <a:t>SELECT name, salary FROM employees ORDER BY salary;</a:t>
             </a:r>
@@ -26237,9 +26237,9 @@
                 <a:solidFill>
                   <a:srgbClr val="E6EAF2"/>
                 </a:solidFill>
-                <a:latin typeface="나눔고딕코딩"/>
-                <a:ea typeface="나눔고딕코딩"/>
-                <a:cs typeface="나눔고딕코딩"/>
+                <a:latin typeface="D2Coding"/>
+                <a:ea typeface="D2Coding"/>
+                <a:cs typeface="D2Coding"/>
               </a:rPr>
               <a:t>-- 조하늘(NULL)이 첫 행</a:t>
             </a:r>
@@ -26255,9 +26255,9 @@
                 <a:solidFill>
                   <a:srgbClr val="E6EAF2"/>
                 </a:solidFill>
-                <a:latin typeface="나눔고딕코딩"/>
-                <a:ea typeface="나눔고딕코딩"/>
-                <a:cs typeface="나눔고딕코딩"/>
+                <a:latin typeface="D2Coding"/>
+                <a:ea typeface="D2Coding"/>
+                <a:cs typeface="D2Coding"/>
               </a:rPr>
               <a:t/>
             </a:r>
@@ -26273,9 +26273,9 @@
                 <a:solidFill>
                   <a:srgbClr val="E6EAF2"/>
                 </a:solidFill>
-                <a:latin typeface="나눔고딕코딩"/>
-                <a:ea typeface="나눔고딕코딩"/>
-                <a:cs typeface="나눔고딕코딩"/>
+                <a:latin typeface="D2Coding"/>
+                <a:ea typeface="D2Coding"/>
+                <a:cs typeface="D2Coding"/>
               </a:rPr>
               <a:t>-- IS NULL 결과(0/1)로 먼저 정렬하여 NULL을 뒤로 보낸다</a:t>
             </a:r>
@@ -26291,9 +26291,9 @@
                 <a:solidFill>
                   <a:srgbClr val="E6EAF2"/>
                 </a:solidFill>
-                <a:latin typeface="나눔고딕코딩"/>
-                <a:ea typeface="나눔고딕코딩"/>
-                <a:cs typeface="나눔고딕코딩"/>
+                <a:latin typeface="D2Coding"/>
+                <a:ea typeface="D2Coding"/>
+                <a:cs typeface="D2Coding"/>
               </a:rPr>
               <a:t>SELECT name, salary</a:t>
             </a:r>
@@ -26309,9 +26309,9 @@
                 <a:solidFill>
                   <a:srgbClr val="E6EAF2"/>
                 </a:solidFill>
-                <a:latin typeface="나눔고딕코딩"/>
-                <a:ea typeface="나눔고딕코딩"/>
-                <a:cs typeface="나눔고딕코딩"/>
+                <a:latin typeface="D2Coding"/>
+                <a:ea typeface="D2Coding"/>
+                <a:cs typeface="D2Coding"/>
               </a:rPr>
               <a:t>FROM   employees</a:t>
             </a:r>
@@ -26327,9 +26327,9 @@
                 <a:solidFill>
                   <a:srgbClr val="E6EAF2"/>
                 </a:solidFill>
-                <a:latin typeface="나눔고딕코딩"/>
-                <a:ea typeface="나눔고딕코딩"/>
-                <a:cs typeface="나눔고딕코딩"/>
+                <a:latin typeface="D2Coding"/>
+                <a:ea typeface="D2Coding"/>
+                <a:cs typeface="D2Coding"/>
               </a:rPr>
               <a:t>ORDER BY salary IS NULL, salary DESC;</a:t>
             </a:r>
@@ -26345,9 +26345,9 @@
                 <a:solidFill>
                   <a:srgbClr val="E6EAF2"/>
                 </a:solidFill>
-                <a:latin typeface="나눔고딕코딩"/>
-                <a:ea typeface="나눔고딕코딩"/>
-                <a:cs typeface="나눔고딕코딩"/>
+                <a:latin typeface="D2Coding"/>
+                <a:ea typeface="D2Coding"/>
+                <a:cs typeface="D2Coding"/>
               </a:rPr>
               <a:t/>
             </a:r>
@@ -26363,9 +26363,9 @@
                 <a:solidFill>
                   <a:srgbClr val="E6EAF2"/>
                 </a:solidFill>
-                <a:latin typeface="나눔고딕코딩"/>
-                <a:ea typeface="나눔고딕코딩"/>
-                <a:cs typeface="나눔고딕코딩"/>
+                <a:latin typeface="D2Coding"/>
+                <a:ea typeface="D2Coding"/>
+                <a:cs typeface="D2Coding"/>
               </a:rPr>
               <a:t>-- 표준 SQL (Oracle, PostgreSQL)은 NULLS LAST를 지원한다</a:t>
             </a:r>
@@ -26381,9 +26381,9 @@
                 <a:solidFill>
                   <a:srgbClr val="E6EAF2"/>
                 </a:solidFill>
-                <a:latin typeface="나눔고딕코딩"/>
-                <a:ea typeface="나눔고딕코딩"/>
-                <a:cs typeface="나눔고딕코딩"/>
+                <a:latin typeface="D2Coding"/>
+                <a:ea typeface="D2Coding"/>
+                <a:cs typeface="D2Coding"/>
               </a:rPr>
               <a:t>-- SELECT name, salary FROM employees ORDER BY salary DESC NULLS LAST;</a:t>
             </a:r>
@@ -27944,9 +27944,9 @@
                 <a:solidFill>
                   <a:srgbClr val="7A869C"/>
                 </a:solidFill>
-                <a:latin typeface="나눔고딕코딩"/>
-                <a:ea typeface="나눔고딕코딩"/>
-                <a:cs typeface="나눔고딕코딩"/>
+                <a:latin typeface="D2Coding"/>
+                <a:ea typeface="D2Coding"/>
+                <a:cs typeface="D2Coding"/>
               </a:rPr>
               <a:t>1</a:t>
             </a:r>
@@ -27962,9 +27962,9 @@
                 <a:solidFill>
                   <a:srgbClr val="7A869C"/>
                 </a:solidFill>
-                <a:latin typeface="나눔고딕코딩"/>
-                <a:ea typeface="나눔고딕코딩"/>
-                <a:cs typeface="나눔고딕코딩"/>
+                <a:latin typeface="D2Coding"/>
+                <a:ea typeface="D2Coding"/>
+                <a:cs typeface="D2Coding"/>
               </a:rPr>
               <a:t>2</a:t>
             </a:r>
@@ -27980,9 +27980,9 @@
                 <a:solidFill>
                   <a:srgbClr val="7A869C"/>
                 </a:solidFill>
-                <a:latin typeface="나눔고딕코딩"/>
-                <a:ea typeface="나눔고딕코딩"/>
-                <a:cs typeface="나눔고딕코딩"/>
+                <a:latin typeface="D2Coding"/>
+                <a:ea typeface="D2Coding"/>
+                <a:cs typeface="D2Coding"/>
               </a:rPr>
               <a:t>3</a:t>
             </a:r>
@@ -27998,9 +27998,9 @@
                 <a:solidFill>
                   <a:srgbClr val="7A869C"/>
                 </a:solidFill>
-                <a:latin typeface="나눔고딕코딩"/>
-                <a:ea typeface="나눔고딕코딩"/>
-                <a:cs typeface="나눔고딕코딩"/>
+                <a:latin typeface="D2Coding"/>
+                <a:ea typeface="D2Coding"/>
+                <a:cs typeface="D2Coding"/>
               </a:rPr>
               <a:t>4</a:t>
             </a:r>
@@ -28016,9 +28016,9 @@
                 <a:solidFill>
                   <a:srgbClr val="7A869C"/>
                 </a:solidFill>
-                <a:latin typeface="나눔고딕코딩"/>
-                <a:ea typeface="나눔고딕코딩"/>
-                <a:cs typeface="나눔고딕코딩"/>
+                <a:latin typeface="D2Coding"/>
+                <a:ea typeface="D2Coding"/>
+                <a:cs typeface="D2Coding"/>
               </a:rPr>
               <a:t>5</a:t>
             </a:r>
@@ -28034,9 +28034,9 @@
                 <a:solidFill>
                   <a:srgbClr val="7A869C"/>
                 </a:solidFill>
-                <a:latin typeface="나눔고딕코딩"/>
-                <a:ea typeface="나눔고딕코딩"/>
-                <a:cs typeface="나눔고딕코딩"/>
+                <a:latin typeface="D2Coding"/>
+                <a:ea typeface="D2Coding"/>
+                <a:cs typeface="D2Coding"/>
               </a:rPr>
               <a:t>6</a:t>
             </a:r>
@@ -28052,9 +28052,9 @@
                 <a:solidFill>
                   <a:srgbClr val="7A869C"/>
                 </a:solidFill>
-                <a:latin typeface="나눔고딕코딩"/>
-                <a:ea typeface="나눔고딕코딩"/>
-                <a:cs typeface="나눔고딕코딩"/>
+                <a:latin typeface="D2Coding"/>
+                <a:ea typeface="D2Coding"/>
+                <a:cs typeface="D2Coding"/>
               </a:rPr>
               <a:t>7</a:t>
             </a:r>
@@ -28070,9 +28070,9 @@
                 <a:solidFill>
                   <a:srgbClr val="7A869C"/>
                 </a:solidFill>
-                <a:latin typeface="나눔고딕코딩"/>
-                <a:ea typeface="나눔고딕코딩"/>
-                <a:cs typeface="나눔고딕코딩"/>
+                <a:latin typeface="D2Coding"/>
+                <a:ea typeface="D2Coding"/>
+                <a:cs typeface="D2Coding"/>
               </a:rPr>
               <a:t>8</a:t>
             </a:r>
@@ -28088,9 +28088,9 @@
                 <a:solidFill>
                   <a:srgbClr val="7A869C"/>
                 </a:solidFill>
-                <a:latin typeface="나눔고딕코딩"/>
-                <a:ea typeface="나눔고딕코딩"/>
-                <a:cs typeface="나눔고딕코딩"/>
+                <a:latin typeface="D2Coding"/>
+                <a:ea typeface="D2Coding"/>
+                <a:cs typeface="D2Coding"/>
               </a:rPr>
               <a:t>9</a:t>
             </a:r>
@@ -28129,9 +28129,9 @@
                 <a:solidFill>
                   <a:srgbClr val="E6EAF2"/>
                 </a:solidFill>
-                <a:latin typeface="나눔고딕코딩"/>
-                <a:ea typeface="나눔고딕코딩"/>
-                <a:cs typeface="나눔고딕코딩"/>
+                <a:latin typeface="D2Coding"/>
+                <a:ea typeface="D2Coding"/>
+                <a:cs typeface="D2Coding"/>
               </a:rPr>
               <a:t>-- 포인트 상위 3명</a:t>
             </a:r>
@@ -28147,9 +28147,9 @@
                 <a:solidFill>
                   <a:srgbClr val="E6EAF2"/>
                 </a:solidFill>
-                <a:latin typeface="나눔고딕코딩"/>
-                <a:ea typeface="나눔고딕코딩"/>
-                <a:cs typeface="나눔고딕코딩"/>
+                <a:latin typeface="D2Coding"/>
+                <a:ea typeface="D2Coding"/>
+                <a:cs typeface="D2Coding"/>
               </a:rPr>
               <a:t>SELECT name, points FROM customers ORDER BY points DESC LIMIT 3;</a:t>
             </a:r>
@@ -28165,9 +28165,9 @@
                 <a:solidFill>
                   <a:srgbClr val="E6EAF2"/>
                 </a:solidFill>
-                <a:latin typeface="나눔고딕코딩"/>
-                <a:ea typeface="나눔고딕코딩"/>
-                <a:cs typeface="나눔고딕코딩"/>
+                <a:latin typeface="D2Coding"/>
+                <a:ea typeface="D2Coding"/>
+                <a:cs typeface="D2Coding"/>
               </a:rPr>
               <a:t>-- 결과: 임수빈(5200), 한가람(4500), 오세영(2300)</a:t>
             </a:r>
@@ -28183,9 +28183,9 @@
                 <a:solidFill>
                   <a:srgbClr val="E6EAF2"/>
                 </a:solidFill>
-                <a:latin typeface="나눔고딕코딩"/>
-                <a:ea typeface="나눔고딕코딩"/>
-                <a:cs typeface="나눔고딕코딩"/>
+                <a:latin typeface="D2Coding"/>
+                <a:ea typeface="D2Coding"/>
+                <a:cs typeface="D2Coding"/>
               </a:rPr>
               <a:t/>
             </a:r>
@@ -28201,9 +28201,9 @@
                 <a:solidFill>
                   <a:srgbClr val="E6EAF2"/>
                 </a:solidFill>
-                <a:latin typeface="나눔고딕코딩"/>
-                <a:ea typeface="나눔고딕코딩"/>
-                <a:cs typeface="나눔고딕코딩"/>
+                <a:latin typeface="D2Coding"/>
+                <a:ea typeface="D2Coding"/>
+                <a:cs typeface="D2Coding"/>
               </a:rPr>
               <a:t>-- 4~6등 (앞의 3건을 건너뛰고 3건)</a:t>
             </a:r>
@@ -28219,9 +28219,9 @@
                 <a:solidFill>
                   <a:srgbClr val="E6EAF2"/>
                 </a:solidFill>
-                <a:latin typeface="나눔고딕코딩"/>
-                <a:ea typeface="나눔고딕코딩"/>
-                <a:cs typeface="나눔고딕코딩"/>
+                <a:latin typeface="D2Coding"/>
+                <a:ea typeface="D2Coding"/>
+                <a:cs typeface="D2Coding"/>
               </a:rPr>
               <a:t>SELECT name, points FROM customers ORDER BY points DESC LIMIT 3 OFFSET 3;</a:t>
             </a:r>
@@ -28237,9 +28237,9 @@
                 <a:solidFill>
                   <a:srgbClr val="E6EAF2"/>
                 </a:solidFill>
-                <a:latin typeface="나눔고딕코딩"/>
-                <a:ea typeface="나눔고딕코딩"/>
-                <a:cs typeface="나눔고딕코딩"/>
+                <a:latin typeface="D2Coding"/>
+                <a:ea typeface="D2Coding"/>
+                <a:cs typeface="D2Coding"/>
               </a:rPr>
               <a:t/>
             </a:r>
@@ -28255,9 +28255,9 @@
                 <a:solidFill>
                   <a:srgbClr val="E6EAF2"/>
                 </a:solidFill>
-                <a:latin typeface="나눔고딕코딩"/>
-                <a:ea typeface="나눔고딕코딩"/>
-                <a:cs typeface="나눔고딕코딩"/>
+                <a:latin typeface="D2Coding"/>
+                <a:ea typeface="D2Coding"/>
+                <a:cs typeface="D2Coding"/>
               </a:rPr>
               <a:t>-- MySQL 축약형: LIMIT 시작위치, 개수</a:t>
             </a:r>
@@ -28273,9 +28273,9 @@
                 <a:solidFill>
                   <a:srgbClr val="E6EAF2"/>
                 </a:solidFill>
-                <a:latin typeface="나눔고딕코딩"/>
-                <a:ea typeface="나눔고딕코딩"/>
-                <a:cs typeface="나눔고딕코딩"/>
+                <a:latin typeface="D2Coding"/>
+                <a:ea typeface="D2Coding"/>
+                <a:cs typeface="D2Coding"/>
               </a:rPr>
               <a:t>SELECT name, points FROM customers ORDER BY points DESC LIMIT 3, 3;</a:t>
             </a:r>
@@ -34470,9 +34470,9 @@
                 <a:solidFill>
                   <a:srgbClr val="7A869C"/>
                 </a:solidFill>
-                <a:latin typeface="나눔고딕코딩"/>
-                <a:ea typeface="나눔고딕코딩"/>
-                <a:cs typeface="나눔고딕코딩"/>
+                <a:latin typeface="D2Coding"/>
+                <a:ea typeface="D2Coding"/>
+                <a:cs typeface="D2Coding"/>
               </a:rPr>
               <a:t>1</a:t>
             </a:r>
@@ -34488,9 +34488,9 @@
                 <a:solidFill>
                   <a:srgbClr val="7A869C"/>
                 </a:solidFill>
-                <a:latin typeface="나눔고딕코딩"/>
-                <a:ea typeface="나눔고딕코딩"/>
-                <a:cs typeface="나눔고딕코딩"/>
+                <a:latin typeface="D2Coding"/>
+                <a:ea typeface="D2Coding"/>
+                <a:cs typeface="D2Coding"/>
               </a:rPr>
               <a:t>2</a:t>
             </a:r>
@@ -34506,9 +34506,9 @@
                 <a:solidFill>
                   <a:srgbClr val="7A869C"/>
                 </a:solidFill>
-                <a:latin typeface="나눔고딕코딩"/>
-                <a:ea typeface="나눔고딕코딩"/>
-                <a:cs typeface="나눔고딕코딩"/>
+                <a:latin typeface="D2Coding"/>
+                <a:ea typeface="D2Coding"/>
+                <a:cs typeface="D2Coding"/>
               </a:rPr>
               <a:t>3</a:t>
             </a:r>
@@ -34524,9 +34524,9 @@
                 <a:solidFill>
                   <a:srgbClr val="7A869C"/>
                 </a:solidFill>
-                <a:latin typeface="나눔고딕코딩"/>
-                <a:ea typeface="나눔고딕코딩"/>
-                <a:cs typeface="나눔고딕코딩"/>
+                <a:latin typeface="D2Coding"/>
+                <a:ea typeface="D2Coding"/>
+                <a:cs typeface="D2Coding"/>
               </a:rPr>
               <a:t>4</a:t>
             </a:r>
@@ -34542,9 +34542,9 @@
                 <a:solidFill>
                   <a:srgbClr val="7A869C"/>
                 </a:solidFill>
-                <a:latin typeface="나눔고딕코딩"/>
-                <a:ea typeface="나눔고딕코딩"/>
-                <a:cs typeface="나눔고딕코딩"/>
+                <a:latin typeface="D2Coding"/>
+                <a:ea typeface="D2Coding"/>
+                <a:cs typeface="D2Coding"/>
               </a:rPr>
               <a:t>5</a:t>
             </a:r>
@@ -34560,9 +34560,9 @@
                 <a:solidFill>
                   <a:srgbClr val="7A869C"/>
                 </a:solidFill>
-                <a:latin typeface="나눔고딕코딩"/>
-                <a:ea typeface="나눔고딕코딩"/>
-                <a:cs typeface="나눔고딕코딩"/>
+                <a:latin typeface="D2Coding"/>
+                <a:ea typeface="D2Coding"/>
+                <a:cs typeface="D2Coding"/>
               </a:rPr>
               <a:t>6</a:t>
             </a:r>
@@ -34578,9 +34578,9 @@
                 <a:solidFill>
                   <a:srgbClr val="7A869C"/>
                 </a:solidFill>
-                <a:latin typeface="나눔고딕코딩"/>
-                <a:ea typeface="나눔고딕코딩"/>
-                <a:cs typeface="나눔고딕코딩"/>
+                <a:latin typeface="D2Coding"/>
+                <a:ea typeface="D2Coding"/>
+                <a:cs typeface="D2Coding"/>
               </a:rPr>
               <a:t>7</a:t>
             </a:r>
@@ -34596,9 +34596,9 @@
                 <a:solidFill>
                   <a:srgbClr val="7A869C"/>
                 </a:solidFill>
-                <a:latin typeface="나눔고딕코딩"/>
-                <a:ea typeface="나눔고딕코딩"/>
-                <a:cs typeface="나눔고딕코딩"/>
+                <a:latin typeface="D2Coding"/>
+                <a:ea typeface="D2Coding"/>
+                <a:cs typeface="D2Coding"/>
               </a:rPr>
               <a:t>8</a:t>
             </a:r>
@@ -34614,9 +34614,9 @@
                 <a:solidFill>
                   <a:srgbClr val="7A869C"/>
                 </a:solidFill>
-                <a:latin typeface="나눔고딕코딩"/>
-                <a:ea typeface="나눔고딕코딩"/>
-                <a:cs typeface="나눔고딕코딩"/>
+                <a:latin typeface="D2Coding"/>
+                <a:ea typeface="D2Coding"/>
+                <a:cs typeface="D2Coding"/>
               </a:rPr>
               <a:t>9</a:t>
             </a:r>
@@ -34632,9 +34632,9 @@
                 <a:solidFill>
                   <a:srgbClr val="7A869C"/>
                 </a:solidFill>
-                <a:latin typeface="나눔고딕코딩"/>
-                <a:ea typeface="나눔고딕코딩"/>
-                <a:cs typeface="나눔고딕코딩"/>
+                <a:latin typeface="D2Coding"/>
+                <a:ea typeface="D2Coding"/>
+                <a:cs typeface="D2Coding"/>
               </a:rPr>
               <a:t>10</a:t>
             </a:r>
@@ -34650,9 +34650,9 @@
                 <a:solidFill>
                   <a:srgbClr val="7A869C"/>
                 </a:solidFill>
-                <a:latin typeface="나눔고딕코딩"/>
-                <a:ea typeface="나눔고딕코딩"/>
-                <a:cs typeface="나눔고딕코딩"/>
+                <a:latin typeface="D2Coding"/>
+                <a:ea typeface="D2Coding"/>
+                <a:cs typeface="D2Coding"/>
               </a:rPr>
               <a:t>11</a:t>
             </a:r>
@@ -34691,9 +34691,9 @@
                 <a:solidFill>
                   <a:srgbClr val="E6EAF2"/>
                 </a:solidFill>
-                <a:latin typeface="나눔고딕코딩"/>
-                <a:ea typeface="나눔고딕코딩"/>
-                <a:cs typeface="나눔고딕코딩"/>
+                <a:latin typeface="D2Coding"/>
+                <a:ea typeface="D2Coding"/>
+                <a:cs typeface="D2Coding"/>
               </a:rPr>
               <a:t>-- 고객 이름과 등급을 결합하여 표시</a:t>
             </a:r>
@@ -34709,9 +34709,9 @@
                 <a:solidFill>
                   <a:srgbClr val="E6EAF2"/>
                 </a:solidFill>
-                <a:latin typeface="나눔고딕코딩"/>
-                <a:ea typeface="나눔고딕코딩"/>
-                <a:cs typeface="나눔고딕코딩"/>
+                <a:latin typeface="D2Coding"/>
+                <a:ea typeface="D2Coding"/>
+                <a:cs typeface="D2Coding"/>
               </a:rPr>
               <a:t>SELECT CONCAT(name, ' (', grade, ')') AS 고객표기 FROM customers;</a:t>
             </a:r>
@@ -34727,9 +34727,9 @@
                 <a:solidFill>
                   <a:srgbClr val="E6EAF2"/>
                 </a:solidFill>
-                <a:latin typeface="나눔고딕코딩"/>
-                <a:ea typeface="나눔고딕코딩"/>
-                <a:cs typeface="나눔고딕코딩"/>
+                <a:latin typeface="D2Coding"/>
+                <a:ea typeface="D2Coding"/>
+                <a:cs typeface="D2Coding"/>
               </a:rPr>
               <a:t/>
             </a:r>
@@ -34745,9 +34745,9 @@
                 <a:solidFill>
                   <a:srgbClr val="E6EAF2"/>
                 </a:solidFill>
-                <a:latin typeface="나눔고딕코딩"/>
-                <a:ea typeface="나눔고딕코딩"/>
-                <a:cs typeface="나눔고딕코딩"/>
+                <a:latin typeface="D2Coding"/>
+                <a:ea typeface="D2Coding"/>
+                <a:cs typeface="D2Coding"/>
               </a:rPr>
               <a:t>-- 이메일에서 아이디 부분만 추출</a:t>
             </a:r>
@@ -34763,9 +34763,9 @@
                 <a:solidFill>
                   <a:srgbClr val="E6EAF2"/>
                 </a:solidFill>
-                <a:latin typeface="나눔고딕코딩"/>
-                <a:ea typeface="나눔고딕코딩"/>
-                <a:cs typeface="나눔고딕코딩"/>
+                <a:latin typeface="D2Coding"/>
+                <a:ea typeface="D2Coding"/>
+                <a:cs typeface="D2Coding"/>
               </a:rPr>
               <a:t>SELECT email,</a:t>
             </a:r>
@@ -34781,9 +34781,9 @@
                 <a:solidFill>
                   <a:srgbClr val="E6EAF2"/>
                 </a:solidFill>
-                <a:latin typeface="나눔고딕코딩"/>
-                <a:ea typeface="나눔고딕코딩"/>
-                <a:cs typeface="나눔고딕코딩"/>
+                <a:latin typeface="D2Coding"/>
+                <a:ea typeface="D2Coding"/>
+                <a:cs typeface="D2Coding"/>
               </a:rPr>
               <a:t>       SUBSTRING(email, 1, INSTR(email,'@') - 1) AS 아이디</a:t>
             </a:r>
@@ -34799,9 +34799,9 @@
                 <a:solidFill>
                   <a:srgbClr val="E6EAF2"/>
                 </a:solidFill>
-                <a:latin typeface="나눔고딕코딩"/>
-                <a:ea typeface="나눔고딕코딩"/>
-                <a:cs typeface="나눔고딕코딩"/>
+                <a:latin typeface="D2Coding"/>
+                <a:ea typeface="D2Coding"/>
+                <a:cs typeface="D2Coding"/>
               </a:rPr>
               <a:t>FROM   customers</a:t>
             </a:r>
@@ -34817,9 +34817,9 @@
                 <a:solidFill>
                   <a:srgbClr val="E6EAF2"/>
                 </a:solidFill>
-                <a:latin typeface="나눔고딕코딩"/>
-                <a:ea typeface="나눔고딕코딩"/>
-                <a:cs typeface="나눔고딕코딩"/>
+                <a:latin typeface="D2Coding"/>
+                <a:ea typeface="D2Coding"/>
+                <a:cs typeface="D2Coding"/>
               </a:rPr>
               <a:t>WHERE  email IS NOT NULL;</a:t>
             </a:r>
@@ -34835,9 +34835,9 @@
                 <a:solidFill>
                   <a:srgbClr val="E6EAF2"/>
                 </a:solidFill>
-                <a:latin typeface="나눔고딕코딩"/>
-                <a:ea typeface="나눔고딕코딩"/>
-                <a:cs typeface="나눔고딕코딩"/>
+                <a:latin typeface="D2Coding"/>
+                <a:ea typeface="D2Coding"/>
+                <a:cs typeface="D2Coding"/>
               </a:rPr>
               <a:t/>
             </a:r>
@@ -34853,9 +34853,9 @@
                 <a:solidFill>
                   <a:srgbClr val="E6EAF2"/>
                 </a:solidFill>
-                <a:latin typeface="나눔고딕코딩"/>
-                <a:ea typeface="나눔고딕코딩"/>
-                <a:cs typeface="나눔고딕코딩"/>
+                <a:latin typeface="D2Coding"/>
+                <a:ea typeface="D2Coding"/>
+                <a:cs typeface="D2Coding"/>
               </a:rPr>
               <a:t>-- 성(첫 글자)만 추출</a:t>
             </a:r>
@@ -34871,9 +34871,9 @@
                 <a:solidFill>
                   <a:srgbClr val="E6EAF2"/>
                 </a:solidFill>
-                <a:latin typeface="나눔고딕코딩"/>
-                <a:ea typeface="나눔고딕코딩"/>
-                <a:cs typeface="나눔고딕코딩"/>
+                <a:latin typeface="D2Coding"/>
+                <a:ea typeface="D2Coding"/>
+                <a:cs typeface="D2Coding"/>
               </a:rPr>
               <a:t>SELECT LEFT(name, 1) AS 성, name FROM customers;</a:t>
             </a:r>
@@ -41346,9 +41346,9 @@
                 <a:solidFill>
                   <a:srgbClr val="7A869C"/>
                 </a:solidFill>
-                <a:latin typeface="나눔고딕코딩"/>
-                <a:ea typeface="나눔고딕코딩"/>
-                <a:cs typeface="나눔고딕코딩"/>
+                <a:latin typeface="D2Coding"/>
+                <a:ea typeface="D2Coding"/>
+                <a:cs typeface="D2Coding"/>
               </a:rPr>
               <a:t>1</a:t>
             </a:r>
@@ -41364,9 +41364,9 @@
                 <a:solidFill>
                   <a:srgbClr val="7A869C"/>
                 </a:solidFill>
-                <a:latin typeface="나눔고딕코딩"/>
-                <a:ea typeface="나눔고딕코딩"/>
-                <a:cs typeface="나눔고딕코딩"/>
+                <a:latin typeface="D2Coding"/>
+                <a:ea typeface="D2Coding"/>
+                <a:cs typeface="D2Coding"/>
               </a:rPr>
               <a:t>2</a:t>
             </a:r>
@@ -41382,9 +41382,9 @@
                 <a:solidFill>
                   <a:srgbClr val="7A869C"/>
                 </a:solidFill>
-                <a:latin typeface="나눔고딕코딩"/>
-                <a:ea typeface="나눔고딕코딩"/>
-                <a:cs typeface="나눔고딕코딩"/>
+                <a:latin typeface="D2Coding"/>
+                <a:ea typeface="D2Coding"/>
+                <a:cs typeface="D2Coding"/>
               </a:rPr>
               <a:t>3</a:t>
             </a:r>
@@ -41400,9 +41400,9 @@
                 <a:solidFill>
                   <a:srgbClr val="7A869C"/>
                 </a:solidFill>
-                <a:latin typeface="나눔고딕코딩"/>
-                <a:ea typeface="나눔고딕코딩"/>
-                <a:cs typeface="나눔고딕코딩"/>
+                <a:latin typeface="D2Coding"/>
+                <a:ea typeface="D2Coding"/>
+                <a:cs typeface="D2Coding"/>
               </a:rPr>
               <a:t>4</a:t>
             </a:r>
@@ -41418,9 +41418,9 @@
                 <a:solidFill>
                   <a:srgbClr val="7A869C"/>
                 </a:solidFill>
-                <a:latin typeface="나눔고딕코딩"/>
-                <a:ea typeface="나눔고딕코딩"/>
-                <a:cs typeface="나눔고딕코딩"/>
+                <a:latin typeface="D2Coding"/>
+                <a:ea typeface="D2Coding"/>
+                <a:cs typeface="D2Coding"/>
               </a:rPr>
               <a:t>5</a:t>
             </a:r>
@@ -41436,9 +41436,9 @@
                 <a:solidFill>
                   <a:srgbClr val="7A869C"/>
                 </a:solidFill>
-                <a:latin typeface="나눔고딕코딩"/>
-                <a:ea typeface="나눔고딕코딩"/>
-                <a:cs typeface="나눔고딕코딩"/>
+                <a:latin typeface="D2Coding"/>
+                <a:ea typeface="D2Coding"/>
+                <a:cs typeface="D2Coding"/>
               </a:rPr>
               <a:t>6</a:t>
             </a:r>
@@ -41454,9 +41454,9 @@
                 <a:solidFill>
                   <a:srgbClr val="7A869C"/>
                 </a:solidFill>
-                <a:latin typeface="나눔고딕코딩"/>
-                <a:ea typeface="나눔고딕코딩"/>
-                <a:cs typeface="나눔고딕코딩"/>
+                <a:latin typeface="D2Coding"/>
+                <a:ea typeface="D2Coding"/>
+                <a:cs typeface="D2Coding"/>
               </a:rPr>
               <a:t>7</a:t>
             </a:r>
@@ -41472,9 +41472,9 @@
                 <a:solidFill>
                   <a:srgbClr val="7A869C"/>
                 </a:solidFill>
-                <a:latin typeface="나눔고딕코딩"/>
-                <a:ea typeface="나눔고딕코딩"/>
-                <a:cs typeface="나눔고딕코딩"/>
+                <a:latin typeface="D2Coding"/>
+                <a:ea typeface="D2Coding"/>
+                <a:cs typeface="D2Coding"/>
               </a:rPr>
               <a:t>8</a:t>
             </a:r>
@@ -41490,9 +41490,9 @@
                 <a:solidFill>
                   <a:srgbClr val="7A869C"/>
                 </a:solidFill>
-                <a:latin typeface="나눔고딕코딩"/>
-                <a:ea typeface="나눔고딕코딩"/>
-                <a:cs typeface="나눔고딕코딩"/>
+                <a:latin typeface="D2Coding"/>
+                <a:ea typeface="D2Coding"/>
+                <a:cs typeface="D2Coding"/>
               </a:rPr>
               <a:t>9</a:t>
             </a:r>
@@ -41508,9 +41508,9 @@
                 <a:solidFill>
                   <a:srgbClr val="7A869C"/>
                 </a:solidFill>
-                <a:latin typeface="나눔고딕코딩"/>
-                <a:ea typeface="나눔고딕코딩"/>
-                <a:cs typeface="나눔고딕코딩"/>
+                <a:latin typeface="D2Coding"/>
+                <a:ea typeface="D2Coding"/>
+                <a:cs typeface="D2Coding"/>
               </a:rPr>
               <a:t>10</a:t>
             </a:r>
@@ -41526,9 +41526,9 @@
                 <a:solidFill>
                   <a:srgbClr val="7A869C"/>
                 </a:solidFill>
-                <a:latin typeface="나눔고딕코딩"/>
-                <a:ea typeface="나눔고딕코딩"/>
-                <a:cs typeface="나눔고딕코딩"/>
+                <a:latin typeface="D2Coding"/>
+                <a:ea typeface="D2Coding"/>
+                <a:cs typeface="D2Coding"/>
               </a:rPr>
               <a:t>11</a:t>
             </a:r>
@@ -41544,9 +41544,9 @@
                 <a:solidFill>
                   <a:srgbClr val="7A869C"/>
                 </a:solidFill>
-                <a:latin typeface="나눔고딕코딩"/>
-                <a:ea typeface="나눔고딕코딩"/>
-                <a:cs typeface="나눔고딕코딩"/>
+                <a:latin typeface="D2Coding"/>
+                <a:ea typeface="D2Coding"/>
+                <a:cs typeface="D2Coding"/>
               </a:rPr>
               <a:t>12</a:t>
             </a:r>
@@ -41585,9 +41585,9 @@
                 <a:solidFill>
                   <a:srgbClr val="E6EAF2"/>
                 </a:solidFill>
-                <a:latin typeface="나눔고딕코딩"/>
-                <a:ea typeface="나눔고딕코딩"/>
-                <a:cs typeface="나눔고딕코딩"/>
+                <a:latin typeface="D2Coding"/>
+                <a:ea typeface="D2Coding"/>
+                <a:cs typeface="D2Coding"/>
               </a:rPr>
               <a:t>SELECT name,</a:t>
             </a:r>
@@ -41603,9 +41603,9 @@
                 <a:solidFill>
                   <a:srgbClr val="E6EAF2"/>
                 </a:solidFill>
-                <a:latin typeface="나눔고딕코딩"/>
-                <a:ea typeface="나눔고딕코딩"/>
-                <a:cs typeface="나눔고딕코딩"/>
+                <a:latin typeface="D2Coding"/>
+                <a:ea typeface="D2Coding"/>
+                <a:cs typeface="D2Coding"/>
               </a:rPr>
               <a:t>       DATE_FORMAT(joined_date, '%Y년 %m월 %d일')       AS 가입일,</a:t>
             </a:r>
@@ -41621,9 +41621,9 @@
                 <a:solidFill>
                   <a:srgbClr val="E6EAF2"/>
                 </a:solidFill>
-                <a:latin typeface="나눔고딕코딩"/>
-                <a:ea typeface="나눔고딕코딩"/>
-                <a:cs typeface="나눔고딕코딩"/>
+                <a:latin typeface="D2Coding"/>
+                <a:ea typeface="D2Coding"/>
+                <a:cs typeface="D2Coding"/>
               </a:rPr>
               <a:t>       TIMESTAMPDIFF(YEAR, joined_date, CURDATE())      AS 가입연차</a:t>
             </a:r>
@@ -41639,9 +41639,9 @@
                 <a:solidFill>
                   <a:srgbClr val="E6EAF2"/>
                 </a:solidFill>
-                <a:latin typeface="나눔고딕코딩"/>
-                <a:ea typeface="나눔고딕코딩"/>
-                <a:cs typeface="나눔고딕코딩"/>
+                <a:latin typeface="D2Coding"/>
+                <a:ea typeface="D2Coding"/>
+                <a:cs typeface="D2Coding"/>
               </a:rPr>
               <a:t>FROM   customers</a:t>
             </a:r>
@@ -41657,9 +41657,9 @@
                 <a:solidFill>
                   <a:srgbClr val="E6EAF2"/>
                 </a:solidFill>
-                <a:latin typeface="나눔고딕코딩"/>
-                <a:ea typeface="나눔고딕코딩"/>
-                <a:cs typeface="나눔고딕코딩"/>
+                <a:latin typeface="D2Coding"/>
+                <a:ea typeface="D2Coding"/>
+                <a:cs typeface="D2Coding"/>
               </a:rPr>
               <a:t>ORDER BY joined_date;</a:t>
             </a:r>
@@ -41675,9 +41675,9 @@
                 <a:solidFill>
                   <a:srgbClr val="E6EAF2"/>
                 </a:solidFill>
-                <a:latin typeface="나눔고딕코딩"/>
-                <a:ea typeface="나눔고딕코딩"/>
-                <a:cs typeface="나눔고딕코딩"/>
+                <a:latin typeface="D2Coding"/>
+                <a:ea typeface="D2Coding"/>
+                <a:cs typeface="D2Coding"/>
               </a:rPr>
               <a:t/>
             </a:r>
@@ -41693,9 +41693,9 @@
                 <a:solidFill>
                   <a:srgbClr val="E6EAF2"/>
                 </a:solidFill>
-                <a:latin typeface="나눔고딕코딩"/>
-                <a:ea typeface="나눔고딕코딩"/>
-                <a:cs typeface="나눔고딕코딩"/>
+                <a:latin typeface="D2Coding"/>
+                <a:ea typeface="D2Coding"/>
+                <a:cs typeface="D2Coding"/>
               </a:rPr>
               <a:t>-- 2024년에 가입한 고객</a:t>
             </a:r>
@@ -41711,9 +41711,9 @@
                 <a:solidFill>
                   <a:srgbClr val="E6EAF2"/>
                 </a:solidFill>
-                <a:latin typeface="나눔고딕코딩"/>
-                <a:ea typeface="나눔고딕코딩"/>
-                <a:cs typeface="나눔고딕코딩"/>
+                <a:latin typeface="D2Coding"/>
+                <a:ea typeface="D2Coding"/>
+                <a:cs typeface="D2Coding"/>
               </a:rPr>
               <a:t>SELECT name FROM customers WHERE YEAR(joined_date) = 2024;</a:t>
             </a:r>
@@ -41729,9 +41729,9 @@
                 <a:solidFill>
                   <a:srgbClr val="E6EAF2"/>
                 </a:solidFill>
-                <a:latin typeface="나눔고딕코딩"/>
-                <a:ea typeface="나눔고딕코딩"/>
-                <a:cs typeface="나눔고딕코딩"/>
+                <a:latin typeface="D2Coding"/>
+                <a:ea typeface="D2Coding"/>
+                <a:cs typeface="D2Coding"/>
               </a:rPr>
               <a:t>-- 결과: 한가람, 오세영, 장민혁</a:t>
             </a:r>
@@ -41747,9 +41747,9 @@
                 <a:solidFill>
                   <a:srgbClr val="E6EAF2"/>
                 </a:solidFill>
-                <a:latin typeface="나눔고딕코딩"/>
-                <a:ea typeface="나눔고딕코딩"/>
-                <a:cs typeface="나눔고딕코딩"/>
+                <a:latin typeface="D2Coding"/>
+                <a:ea typeface="D2Coding"/>
+                <a:cs typeface="D2Coding"/>
               </a:rPr>
               <a:t/>
             </a:r>
@@ -41765,9 +41765,9 @@
                 <a:solidFill>
                   <a:srgbClr val="E6EAF2"/>
                 </a:solidFill>
-                <a:latin typeface="나눔고딕코딩"/>
-                <a:ea typeface="나눔고딕코딩"/>
-                <a:cs typeface="나눔고딕코딩"/>
+                <a:latin typeface="D2Coding"/>
+                <a:ea typeface="D2Coding"/>
+                <a:cs typeface="D2Coding"/>
               </a:rPr>
               <a:t>-- 주문일을 월 단위로 표기 (6주차 월별 집계의 재료)</a:t>
             </a:r>
@@ -41783,9 +41783,9 @@
                 <a:solidFill>
                   <a:srgbClr val="E6EAF2"/>
                 </a:solidFill>
-                <a:latin typeface="나눔고딕코딩"/>
-                <a:ea typeface="나눔고딕코딩"/>
-                <a:cs typeface="나눔고딕코딩"/>
+                <a:latin typeface="D2Coding"/>
+                <a:ea typeface="D2Coding"/>
+                <a:cs typeface="D2Coding"/>
               </a:rPr>
               <a:t>SELECT order_id, DATE_FORMAT(order_date, '%Y-%m') AS 주문월 FROM orders;</a:t>
             </a:r>
@@ -49412,9 +49412,9 @@
                 <a:solidFill>
                   <a:srgbClr val="7A869C"/>
                 </a:solidFill>
-                <a:latin typeface="나눔고딕코딩"/>
-                <a:ea typeface="나눔고딕코딩"/>
-                <a:cs typeface="나눔고딕코딩"/>
+                <a:latin typeface="D2Coding"/>
+                <a:ea typeface="D2Coding"/>
+                <a:cs typeface="D2Coding"/>
               </a:rPr>
               <a:t>1</a:t>
             </a:r>
@@ -49430,9 +49430,9 @@
                 <a:solidFill>
                   <a:srgbClr val="7A869C"/>
                 </a:solidFill>
-                <a:latin typeface="나눔고딕코딩"/>
-                <a:ea typeface="나눔고딕코딩"/>
-                <a:cs typeface="나눔고딕코딩"/>
+                <a:latin typeface="D2Coding"/>
+                <a:ea typeface="D2Coding"/>
+                <a:cs typeface="D2Coding"/>
               </a:rPr>
               <a:t>2</a:t>
             </a:r>
@@ -49448,9 +49448,9 @@
                 <a:solidFill>
                   <a:srgbClr val="7A869C"/>
                 </a:solidFill>
-                <a:latin typeface="나눔고딕코딩"/>
-                <a:ea typeface="나눔고딕코딩"/>
-                <a:cs typeface="나눔고딕코딩"/>
+                <a:latin typeface="D2Coding"/>
+                <a:ea typeface="D2Coding"/>
+                <a:cs typeface="D2Coding"/>
               </a:rPr>
               <a:t>3</a:t>
             </a:r>
@@ -49466,9 +49466,9 @@
                 <a:solidFill>
                   <a:srgbClr val="7A869C"/>
                 </a:solidFill>
-                <a:latin typeface="나눔고딕코딩"/>
-                <a:ea typeface="나눔고딕코딩"/>
-                <a:cs typeface="나눔고딕코딩"/>
+                <a:latin typeface="D2Coding"/>
+                <a:ea typeface="D2Coding"/>
+                <a:cs typeface="D2Coding"/>
               </a:rPr>
               <a:t>4</a:t>
             </a:r>
@@ -49484,9 +49484,9 @@
                 <a:solidFill>
                   <a:srgbClr val="7A869C"/>
                 </a:solidFill>
-                <a:latin typeface="나눔고딕코딩"/>
-                <a:ea typeface="나눔고딕코딩"/>
-                <a:cs typeface="나눔고딕코딩"/>
+                <a:latin typeface="D2Coding"/>
+                <a:ea typeface="D2Coding"/>
+                <a:cs typeface="D2Coding"/>
               </a:rPr>
               <a:t>5</a:t>
             </a:r>
@@ -49502,9 +49502,9 @@
                 <a:solidFill>
                   <a:srgbClr val="7A869C"/>
                 </a:solidFill>
-                <a:latin typeface="나눔고딕코딩"/>
-                <a:ea typeface="나눔고딕코딩"/>
-                <a:cs typeface="나눔고딕코딩"/>
+                <a:latin typeface="D2Coding"/>
+                <a:ea typeface="D2Coding"/>
+                <a:cs typeface="D2Coding"/>
               </a:rPr>
               <a:t>6</a:t>
             </a:r>
@@ -49520,9 +49520,9 @@
                 <a:solidFill>
                   <a:srgbClr val="7A869C"/>
                 </a:solidFill>
-                <a:latin typeface="나눔고딕코딩"/>
-                <a:ea typeface="나눔고딕코딩"/>
-                <a:cs typeface="나눔고딕코딩"/>
+                <a:latin typeface="D2Coding"/>
+                <a:ea typeface="D2Coding"/>
+                <a:cs typeface="D2Coding"/>
               </a:rPr>
               <a:t>7</a:t>
             </a:r>
@@ -49561,9 +49561,9 @@
                 <a:solidFill>
                   <a:srgbClr val="E6EAF2"/>
                 </a:solidFill>
-                <a:latin typeface="나눔고딕코딩"/>
-                <a:ea typeface="나눔고딕코딩"/>
-                <a:cs typeface="나눔고딕코딩"/>
+                <a:latin typeface="D2Coding"/>
+                <a:ea typeface="D2Coding"/>
+                <a:cs typeface="D2Coding"/>
               </a:rPr>
               <a:t>SELECT   [DISTINCT] 컬럼목록      -- ⑤ 표시할 열 선택</a:t>
             </a:r>
@@ -49579,9 +49579,9 @@
                 <a:solidFill>
                   <a:srgbClr val="E6EAF2"/>
                 </a:solidFill>
-                <a:latin typeface="나눔고딕코딩"/>
-                <a:ea typeface="나눔고딕코딩"/>
-                <a:cs typeface="나눔고딕코딩"/>
+                <a:latin typeface="D2Coding"/>
+                <a:ea typeface="D2Coding"/>
+                <a:cs typeface="D2Coding"/>
               </a:rPr>
               <a:t>FROM     테이블명                 -- ① 대상 테이블</a:t>
             </a:r>
@@ -49597,9 +49597,9 @@
                 <a:solidFill>
                   <a:srgbClr val="E6EAF2"/>
                 </a:solidFill>
-                <a:latin typeface="나눔고딕코딩"/>
-                <a:ea typeface="나눔고딕코딩"/>
-                <a:cs typeface="나눔고딕코딩"/>
+                <a:latin typeface="D2Coding"/>
+                <a:ea typeface="D2Coding"/>
+                <a:cs typeface="D2Coding"/>
               </a:rPr>
               <a:t>WHERE    조건                     -- ② 행 필터링</a:t>
             </a:r>
@@ -49615,9 +49615,9 @@
                 <a:solidFill>
                   <a:srgbClr val="E6EAF2"/>
                 </a:solidFill>
-                <a:latin typeface="나눔고딕코딩"/>
-                <a:ea typeface="나눔고딕코딩"/>
-                <a:cs typeface="나눔고딕코딩"/>
+                <a:latin typeface="D2Coding"/>
+                <a:ea typeface="D2Coding"/>
+                <a:cs typeface="D2Coding"/>
               </a:rPr>
               <a:t>GROUP BY 컬럼                     -- ③ 그룹화</a:t>
             </a:r>
@@ -49633,9 +49633,9 @@
                 <a:solidFill>
                   <a:srgbClr val="E6EAF2"/>
                 </a:solidFill>
-                <a:latin typeface="나눔고딕코딩"/>
-                <a:ea typeface="나눔고딕코딩"/>
-                <a:cs typeface="나눔고딕코딩"/>
+                <a:latin typeface="D2Coding"/>
+                <a:ea typeface="D2Coding"/>
+                <a:cs typeface="D2Coding"/>
               </a:rPr>
               <a:t>HAVING   그룹조건                 -- ④ 그룹 필터링</a:t>
             </a:r>
@@ -49651,9 +49651,9 @@
                 <a:solidFill>
                   <a:srgbClr val="E6EAF2"/>
                 </a:solidFill>
-                <a:latin typeface="나눔고딕코딩"/>
-                <a:ea typeface="나눔고딕코딩"/>
-                <a:cs typeface="나눔고딕코딩"/>
+                <a:latin typeface="D2Coding"/>
+                <a:ea typeface="D2Coding"/>
+                <a:cs typeface="D2Coding"/>
               </a:rPr>
               <a:t>ORDER BY 컬럼 [ASC|DESC]          -- ⑥ 정렬</a:t>
             </a:r>
@@ -49669,9 +49669,9 @@
                 <a:solidFill>
                   <a:srgbClr val="E6EAF2"/>
                 </a:solidFill>
-                <a:latin typeface="나눔고딕코딩"/>
-                <a:ea typeface="나눔고딕코딩"/>
-                <a:cs typeface="나눔고딕코딩"/>
+                <a:latin typeface="D2Coding"/>
+                <a:ea typeface="D2Coding"/>
+                <a:cs typeface="D2Coding"/>
               </a:rPr>
               <a:t>LIMIT    개수 [OFFSET 시작];      -- ⑦ 결과 제한</a:t>
             </a:r>
@@ -52696,9 +52696,9 @@
                 <a:solidFill>
                   <a:srgbClr val="7A869C"/>
                 </a:solidFill>
-                <a:latin typeface="나눔고딕코딩"/>
-                <a:ea typeface="나눔고딕코딩"/>
-                <a:cs typeface="나눔고딕코딩"/>
+                <a:latin typeface="D2Coding"/>
+                <a:ea typeface="D2Coding"/>
+                <a:cs typeface="D2Coding"/>
               </a:rPr>
               <a:t>1</a:t>
             </a:r>
@@ -52714,9 +52714,9 @@
                 <a:solidFill>
                   <a:srgbClr val="7A869C"/>
                 </a:solidFill>
-                <a:latin typeface="나눔고딕코딩"/>
-                <a:ea typeface="나눔고딕코딩"/>
-                <a:cs typeface="나눔고딕코딩"/>
+                <a:latin typeface="D2Coding"/>
+                <a:ea typeface="D2Coding"/>
+                <a:cs typeface="D2Coding"/>
               </a:rPr>
               <a:t>2</a:t>
             </a:r>
@@ -52732,9 +52732,9 @@
                 <a:solidFill>
                   <a:srgbClr val="7A869C"/>
                 </a:solidFill>
-                <a:latin typeface="나눔고딕코딩"/>
-                <a:ea typeface="나눔고딕코딩"/>
-                <a:cs typeface="나눔고딕코딩"/>
+                <a:latin typeface="D2Coding"/>
+                <a:ea typeface="D2Coding"/>
+                <a:cs typeface="D2Coding"/>
               </a:rPr>
               <a:t>3</a:t>
             </a:r>
@@ -52750,9 +52750,9 @@
                 <a:solidFill>
                   <a:srgbClr val="7A869C"/>
                 </a:solidFill>
-                <a:latin typeface="나눔고딕코딩"/>
-                <a:ea typeface="나눔고딕코딩"/>
-                <a:cs typeface="나눔고딕코딩"/>
+                <a:latin typeface="D2Coding"/>
+                <a:ea typeface="D2Coding"/>
+                <a:cs typeface="D2Coding"/>
               </a:rPr>
               <a:t>4</a:t>
             </a:r>
@@ -52768,9 +52768,9 @@
                 <a:solidFill>
                   <a:srgbClr val="7A869C"/>
                 </a:solidFill>
-                <a:latin typeface="나눔고딕코딩"/>
-                <a:ea typeface="나눔고딕코딩"/>
-                <a:cs typeface="나눔고딕코딩"/>
+                <a:latin typeface="D2Coding"/>
+                <a:ea typeface="D2Coding"/>
+                <a:cs typeface="D2Coding"/>
               </a:rPr>
               <a:t>5</a:t>
             </a:r>
@@ -52786,9 +52786,9 @@
                 <a:solidFill>
                   <a:srgbClr val="7A869C"/>
                 </a:solidFill>
-                <a:latin typeface="나눔고딕코딩"/>
-                <a:ea typeface="나눔고딕코딩"/>
-                <a:cs typeface="나눔고딕코딩"/>
+                <a:latin typeface="D2Coding"/>
+                <a:ea typeface="D2Coding"/>
+                <a:cs typeface="D2Coding"/>
               </a:rPr>
               <a:t>6</a:t>
             </a:r>
@@ -52804,9 +52804,9 @@
                 <a:solidFill>
                   <a:srgbClr val="7A869C"/>
                 </a:solidFill>
-                <a:latin typeface="나눔고딕코딩"/>
-                <a:ea typeface="나눔고딕코딩"/>
-                <a:cs typeface="나눔고딕코딩"/>
+                <a:latin typeface="D2Coding"/>
+                <a:ea typeface="D2Coding"/>
+                <a:cs typeface="D2Coding"/>
               </a:rPr>
               <a:t>7</a:t>
             </a:r>
@@ -52822,9 +52822,9 @@
                 <a:solidFill>
                   <a:srgbClr val="7A869C"/>
                 </a:solidFill>
-                <a:latin typeface="나눔고딕코딩"/>
-                <a:ea typeface="나눔고딕코딩"/>
-                <a:cs typeface="나눔고딕코딩"/>
+                <a:latin typeface="D2Coding"/>
+                <a:ea typeface="D2Coding"/>
+                <a:cs typeface="D2Coding"/>
               </a:rPr>
               <a:t>8</a:t>
             </a:r>
@@ -52840,9 +52840,9 @@
                 <a:solidFill>
                   <a:srgbClr val="7A869C"/>
                 </a:solidFill>
-                <a:latin typeface="나눔고딕코딩"/>
-                <a:ea typeface="나눔고딕코딩"/>
-                <a:cs typeface="나눔고딕코딩"/>
+                <a:latin typeface="D2Coding"/>
+                <a:ea typeface="D2Coding"/>
+                <a:cs typeface="D2Coding"/>
               </a:rPr>
               <a:t>9</a:t>
             </a:r>
@@ -52858,9 +52858,9 @@
                 <a:solidFill>
                   <a:srgbClr val="7A869C"/>
                 </a:solidFill>
-                <a:latin typeface="나눔고딕코딩"/>
-                <a:ea typeface="나눔고딕코딩"/>
-                <a:cs typeface="나눔고딕코딩"/>
+                <a:latin typeface="D2Coding"/>
+                <a:ea typeface="D2Coding"/>
+                <a:cs typeface="D2Coding"/>
               </a:rPr>
               <a:t>10</a:t>
             </a:r>
@@ -52876,9 +52876,9 @@
                 <a:solidFill>
                   <a:srgbClr val="7A869C"/>
                 </a:solidFill>
-                <a:latin typeface="나눔고딕코딩"/>
-                <a:ea typeface="나눔고딕코딩"/>
-                <a:cs typeface="나눔고딕코딩"/>
+                <a:latin typeface="D2Coding"/>
+                <a:ea typeface="D2Coding"/>
+                <a:cs typeface="D2Coding"/>
               </a:rPr>
               <a:t>11</a:t>
             </a:r>
@@ -52917,9 +52917,9 @@
                 <a:solidFill>
                   <a:srgbClr val="E6EAF2"/>
                 </a:solidFill>
-                <a:latin typeface="나눔고딕코딩"/>
-                <a:ea typeface="나눔고딕코딩"/>
-                <a:cs typeface="나눔고딕코딩"/>
+                <a:latin typeface="D2Coding"/>
+                <a:ea typeface="D2Coding"/>
+                <a:cs typeface="D2Coding"/>
               </a:rPr>
               <a:t>-- 전체 컬럼</a:t>
             </a:r>
@@ -52935,9 +52935,9 @@
                 <a:solidFill>
                   <a:srgbClr val="E6EAF2"/>
                 </a:solidFill>
-                <a:latin typeface="나눔고딕코딩"/>
-                <a:ea typeface="나눔고딕코딩"/>
-                <a:cs typeface="나눔고딕코딩"/>
+                <a:latin typeface="D2Coding"/>
+                <a:ea typeface="D2Coding"/>
+                <a:cs typeface="D2Coding"/>
               </a:rPr>
               <a:t>SELECT * FROM customers;</a:t>
             </a:r>
@@ -52953,9 +52953,9 @@
                 <a:solidFill>
                   <a:srgbClr val="E6EAF2"/>
                 </a:solidFill>
-                <a:latin typeface="나눔고딕코딩"/>
-                <a:ea typeface="나눔고딕코딩"/>
-                <a:cs typeface="나눔고딕코딩"/>
+                <a:latin typeface="D2Coding"/>
+                <a:ea typeface="D2Coding"/>
+                <a:cs typeface="D2Coding"/>
               </a:rPr>
               <a:t/>
             </a:r>
@@ -52971,9 +52971,9 @@
                 <a:solidFill>
                   <a:srgbClr val="E6EAF2"/>
                 </a:solidFill>
-                <a:latin typeface="나눔고딕코딩"/>
-                <a:ea typeface="나눔고딕코딩"/>
-                <a:cs typeface="나눔고딕코딩"/>
+                <a:latin typeface="D2Coding"/>
+                <a:ea typeface="D2Coding"/>
+                <a:cs typeface="D2Coding"/>
               </a:rPr>
               <a:t>-- 특정 컬럼</a:t>
             </a:r>
@@ -52989,9 +52989,9 @@
                 <a:solidFill>
                   <a:srgbClr val="E6EAF2"/>
                 </a:solidFill>
-                <a:latin typeface="나눔고딕코딩"/>
-                <a:ea typeface="나눔고딕코딩"/>
-                <a:cs typeface="나눔고딕코딩"/>
+                <a:latin typeface="D2Coding"/>
+                <a:ea typeface="D2Coding"/>
+                <a:cs typeface="D2Coding"/>
               </a:rPr>
               <a:t>SELECT cust_id, name, points FROM customers;</a:t>
             </a:r>
@@ -53007,9 +53007,9 @@
                 <a:solidFill>
                   <a:srgbClr val="E6EAF2"/>
                 </a:solidFill>
-                <a:latin typeface="나눔고딕코딩"/>
-                <a:ea typeface="나눔고딕코딩"/>
-                <a:cs typeface="나눔고딕코딩"/>
+                <a:latin typeface="D2Coding"/>
+                <a:ea typeface="D2Coding"/>
+                <a:cs typeface="D2Coding"/>
               </a:rPr>
               <a:t/>
             </a:r>
@@ -53025,9 +53025,9 @@
                 <a:solidFill>
                   <a:srgbClr val="E6EAF2"/>
                 </a:solidFill>
-                <a:latin typeface="나눔고딕코딩"/>
-                <a:ea typeface="나눔고딕코딩"/>
-                <a:cs typeface="나눔고딕코딩"/>
+                <a:latin typeface="D2Coding"/>
+                <a:ea typeface="D2Coding"/>
+                <a:cs typeface="D2Coding"/>
               </a:rPr>
               <a:t>-- 별칭(AS) — AS는 생략 가능</a:t>
             </a:r>
@@ -53043,9 +53043,9 @@
                 <a:solidFill>
                   <a:srgbClr val="E6EAF2"/>
                 </a:solidFill>
-                <a:latin typeface="나눔고딕코딩"/>
-                <a:ea typeface="나눔고딕코딩"/>
-                <a:cs typeface="나눔고딕코딩"/>
+                <a:latin typeface="D2Coding"/>
+                <a:ea typeface="D2Coding"/>
+                <a:cs typeface="D2Coding"/>
               </a:rPr>
               <a:t>SELECT cust_id AS 고객번호,</a:t>
             </a:r>
@@ -53061,9 +53061,9 @@
                 <a:solidFill>
                   <a:srgbClr val="E6EAF2"/>
                 </a:solidFill>
-                <a:latin typeface="나눔고딕코딩"/>
-                <a:ea typeface="나눔고딕코딩"/>
-                <a:cs typeface="나눔고딕코딩"/>
+                <a:latin typeface="D2Coding"/>
+                <a:ea typeface="D2Coding"/>
+                <a:cs typeface="D2Coding"/>
               </a:rPr>
               <a:t>       name    AS 이름,</a:t>
             </a:r>
@@ -53079,9 +53079,9 @@
                 <a:solidFill>
                   <a:srgbClr val="E6EAF2"/>
                 </a:solidFill>
-                <a:latin typeface="나눔고딕코딩"/>
-                <a:ea typeface="나눔고딕코딩"/>
-                <a:cs typeface="나눔고딕코딩"/>
+                <a:latin typeface="D2Coding"/>
+                <a:ea typeface="D2Coding"/>
+                <a:cs typeface="D2Coding"/>
               </a:rPr>
               <a:t>       points  AS 포인트</a:t>
             </a:r>
@@ -53097,9 +53097,9 @@
                 <a:solidFill>
                   <a:srgbClr val="E6EAF2"/>
                 </a:solidFill>
-                <a:latin typeface="나눔고딕코딩"/>
-                <a:ea typeface="나눔고딕코딩"/>
-                <a:cs typeface="나눔고딕코딩"/>
+                <a:latin typeface="D2Coding"/>
+                <a:ea typeface="D2Coding"/>
+                <a:cs typeface="D2Coding"/>
               </a:rPr>
               <a:t>FROM   customers;</a:t>
             </a:r>
@@ -54660,9 +54660,9 @@
                 <a:solidFill>
                   <a:srgbClr val="7A869C"/>
                 </a:solidFill>
-                <a:latin typeface="나눔고딕코딩"/>
-                <a:ea typeface="나눔고딕코딩"/>
-                <a:cs typeface="나눔고딕코딩"/>
+                <a:latin typeface="D2Coding"/>
+                <a:ea typeface="D2Coding"/>
+                <a:cs typeface="D2Coding"/>
               </a:rPr>
               <a:t>1</a:t>
             </a:r>
@@ -54678,9 +54678,9 @@
                 <a:solidFill>
                   <a:srgbClr val="7A869C"/>
                 </a:solidFill>
-                <a:latin typeface="나눔고딕코딩"/>
-                <a:ea typeface="나눔고딕코딩"/>
-                <a:cs typeface="나눔고딕코딩"/>
+                <a:latin typeface="D2Coding"/>
+                <a:ea typeface="D2Coding"/>
+                <a:cs typeface="D2Coding"/>
               </a:rPr>
               <a:t>2</a:t>
             </a:r>
@@ -54696,9 +54696,9 @@
                 <a:solidFill>
                   <a:srgbClr val="7A869C"/>
                 </a:solidFill>
-                <a:latin typeface="나눔고딕코딩"/>
-                <a:ea typeface="나눔고딕코딩"/>
-                <a:cs typeface="나눔고딕코딩"/>
+                <a:latin typeface="D2Coding"/>
+                <a:ea typeface="D2Coding"/>
+                <a:cs typeface="D2Coding"/>
               </a:rPr>
               <a:t>3</a:t>
             </a:r>
@@ -54714,9 +54714,9 @@
                 <a:solidFill>
                   <a:srgbClr val="7A869C"/>
                 </a:solidFill>
-                <a:latin typeface="나눔고딕코딩"/>
-                <a:ea typeface="나눔고딕코딩"/>
-                <a:cs typeface="나눔고딕코딩"/>
+                <a:latin typeface="D2Coding"/>
+                <a:ea typeface="D2Coding"/>
+                <a:cs typeface="D2Coding"/>
               </a:rPr>
               <a:t>4</a:t>
             </a:r>
@@ -54732,9 +54732,9 @@
                 <a:solidFill>
                   <a:srgbClr val="7A869C"/>
                 </a:solidFill>
-                <a:latin typeface="나눔고딕코딩"/>
-                <a:ea typeface="나눔고딕코딩"/>
-                <a:cs typeface="나눔고딕코딩"/>
+                <a:latin typeface="D2Coding"/>
+                <a:ea typeface="D2Coding"/>
+                <a:cs typeface="D2Coding"/>
               </a:rPr>
               <a:t>5</a:t>
             </a:r>
@@ -54750,9 +54750,9 @@
                 <a:solidFill>
                   <a:srgbClr val="7A869C"/>
                 </a:solidFill>
-                <a:latin typeface="나눔고딕코딩"/>
-                <a:ea typeface="나눔고딕코딩"/>
-                <a:cs typeface="나눔고딕코딩"/>
+                <a:latin typeface="D2Coding"/>
+                <a:ea typeface="D2Coding"/>
+                <a:cs typeface="D2Coding"/>
               </a:rPr>
               <a:t>6</a:t>
             </a:r>
@@ -54768,9 +54768,9 @@
                 <a:solidFill>
                   <a:srgbClr val="7A869C"/>
                 </a:solidFill>
-                <a:latin typeface="나눔고딕코딩"/>
-                <a:ea typeface="나눔고딕코딩"/>
-                <a:cs typeface="나눔고딕코딩"/>
+                <a:latin typeface="D2Coding"/>
+                <a:ea typeface="D2Coding"/>
+                <a:cs typeface="D2Coding"/>
               </a:rPr>
               <a:t>7</a:t>
             </a:r>
@@ -54786,9 +54786,9 @@
                 <a:solidFill>
                   <a:srgbClr val="7A869C"/>
                 </a:solidFill>
-                <a:latin typeface="나눔고딕코딩"/>
-                <a:ea typeface="나눔고딕코딩"/>
-                <a:cs typeface="나눔고딕코딩"/>
+                <a:latin typeface="D2Coding"/>
+                <a:ea typeface="D2Coding"/>
+                <a:cs typeface="D2Coding"/>
               </a:rPr>
               <a:t>8</a:t>
             </a:r>
@@ -54804,9 +54804,9 @@
                 <a:solidFill>
                   <a:srgbClr val="7A869C"/>
                 </a:solidFill>
-                <a:latin typeface="나눔고딕코딩"/>
-                <a:ea typeface="나눔고딕코딩"/>
-                <a:cs typeface="나눔고딕코딩"/>
+                <a:latin typeface="D2Coding"/>
+                <a:ea typeface="D2Coding"/>
+                <a:cs typeface="D2Coding"/>
               </a:rPr>
               <a:t>9</a:t>
             </a:r>
@@ -54845,9 +54845,9 @@
                 <a:solidFill>
                   <a:srgbClr val="E6EAF2"/>
                 </a:solidFill>
-                <a:latin typeface="나눔고딕코딩"/>
-                <a:ea typeface="나눔고딕코딩"/>
-                <a:cs typeface="나눔고딕코딩"/>
+                <a:latin typeface="D2Coding"/>
+                <a:ea typeface="D2Coding"/>
+                <a:cs typeface="D2Coding"/>
               </a:rPr>
               <a:t>-- 공백이 포함된 별칭은 따옴표로 감싼다</a:t>
             </a:r>
@@ -54863,9 +54863,9 @@
                 <a:solidFill>
                   <a:srgbClr val="E6EAF2"/>
                 </a:solidFill>
-                <a:latin typeface="나눔고딕코딩"/>
-                <a:ea typeface="나눔고딕코딩"/>
-                <a:cs typeface="나눔고딕코딩"/>
+                <a:latin typeface="D2Coding"/>
+                <a:ea typeface="D2Coding"/>
+                <a:cs typeface="D2Coding"/>
               </a:rPr>
               <a:t>SELECT name AS '고객 이름', price * 0.9 AS '10% 할인가'</a:t>
             </a:r>
@@ -54881,9 +54881,9 @@
                 <a:solidFill>
                   <a:srgbClr val="E6EAF2"/>
                 </a:solidFill>
-                <a:latin typeface="나눔고딕코딩"/>
-                <a:ea typeface="나눔고딕코딩"/>
-                <a:cs typeface="나눔고딕코딩"/>
+                <a:latin typeface="D2Coding"/>
+                <a:ea typeface="D2Coding"/>
+                <a:cs typeface="D2Coding"/>
               </a:rPr>
               <a:t>FROM   products;</a:t>
             </a:r>
@@ -54899,9 +54899,9 @@
                 <a:solidFill>
                   <a:srgbClr val="E6EAF2"/>
                 </a:solidFill>
-                <a:latin typeface="나눔고딕코딩"/>
-                <a:ea typeface="나눔고딕코딩"/>
-                <a:cs typeface="나눔고딕코딩"/>
+                <a:latin typeface="D2Coding"/>
+                <a:ea typeface="D2Coding"/>
+                <a:cs typeface="D2Coding"/>
               </a:rPr>
               <a:t/>
             </a:r>
@@ -54917,9 +54917,9 @@
                 <a:solidFill>
                   <a:srgbClr val="E6EAF2"/>
                 </a:solidFill>
-                <a:latin typeface="나눔고딕코딩"/>
-                <a:ea typeface="나눔고딕코딩"/>
-                <a:cs typeface="나눔고딕코딩"/>
+                <a:latin typeface="D2Coding"/>
+                <a:ea typeface="D2Coding"/>
+                <a:cs typeface="D2Coding"/>
               </a:rPr>
               <a:t>-- 산술 연산과 문자열 연결</a:t>
             </a:r>
@@ -54935,9 +54935,9 @@
                 <a:solidFill>
                   <a:srgbClr val="E6EAF2"/>
                 </a:solidFill>
-                <a:latin typeface="나눔고딕코딩"/>
-                <a:ea typeface="나눔고딕코딩"/>
-                <a:cs typeface="나눔고딕코딩"/>
+                <a:latin typeface="D2Coding"/>
+                <a:ea typeface="D2Coding"/>
+                <a:cs typeface="D2Coding"/>
               </a:rPr>
               <a:t>SELECT name,</a:t>
             </a:r>
@@ -54953,9 +54953,9 @@
                 <a:solidFill>
                   <a:srgbClr val="E6EAF2"/>
                 </a:solidFill>
-                <a:latin typeface="나눔고딕코딩"/>
-                <a:ea typeface="나눔고딕코딩"/>
-                <a:cs typeface="나눔고딕코딩"/>
+                <a:latin typeface="D2Coding"/>
+                <a:ea typeface="D2Coding"/>
+                <a:cs typeface="D2Coding"/>
               </a:rPr>
               <a:t>       price * stock                    AS 재고자산액,</a:t>
             </a:r>
@@ -54971,9 +54971,9 @@
                 <a:solidFill>
                   <a:srgbClr val="E6EAF2"/>
                 </a:solidFill>
-                <a:latin typeface="나눔고딕코딩"/>
-                <a:ea typeface="나눔고딕코딩"/>
-                <a:cs typeface="나눔고딕코딩"/>
+                <a:latin typeface="D2Coding"/>
+                <a:ea typeface="D2Coding"/>
+                <a:cs typeface="D2Coding"/>
               </a:rPr>
               <a:t>       CONCAT(name, '(', prod_id, ')')  AS 표기</a:t>
             </a:r>
@@ -54989,9 +54989,9 @@
                 <a:solidFill>
                   <a:srgbClr val="E6EAF2"/>
                 </a:solidFill>
-                <a:latin typeface="나눔고딕코딩"/>
-                <a:ea typeface="나눔고딕코딩"/>
-                <a:cs typeface="나눔고딕코딩"/>
+                <a:latin typeface="D2Coding"/>
+                <a:ea typeface="D2Coding"/>
+                <a:cs typeface="D2Coding"/>
               </a:rPr>
               <a:t>FROM   products;</a:t>
             </a:r>
@@ -56683,9 +56683,9 @@
                 <a:solidFill>
                   <a:srgbClr val="7A869C"/>
                 </a:solidFill>
-                <a:latin typeface="나눔고딕코딩"/>
-                <a:ea typeface="나눔고딕코딩"/>
-                <a:cs typeface="나눔고딕코딩"/>
+                <a:latin typeface="D2Coding"/>
+                <a:ea typeface="D2Coding"/>
+                <a:cs typeface="D2Coding"/>
               </a:rPr>
               <a:t>1</a:t>
             </a:r>
@@ -56701,9 +56701,9 @@
                 <a:solidFill>
                   <a:srgbClr val="7A869C"/>
                 </a:solidFill>
-                <a:latin typeface="나눔고딕코딩"/>
-                <a:ea typeface="나눔고딕코딩"/>
-                <a:cs typeface="나눔고딕코딩"/>
+                <a:latin typeface="D2Coding"/>
+                <a:ea typeface="D2Coding"/>
+                <a:cs typeface="D2Coding"/>
               </a:rPr>
               <a:t>2</a:t>
             </a:r>
@@ -56719,9 +56719,9 @@
                 <a:solidFill>
                   <a:srgbClr val="7A869C"/>
                 </a:solidFill>
-                <a:latin typeface="나눔고딕코딩"/>
-                <a:ea typeface="나눔고딕코딩"/>
-                <a:cs typeface="나눔고딕코딩"/>
+                <a:latin typeface="D2Coding"/>
+                <a:ea typeface="D2Coding"/>
+                <a:cs typeface="D2Coding"/>
               </a:rPr>
               <a:t>3</a:t>
             </a:r>
@@ -56737,9 +56737,9 @@
                 <a:solidFill>
                   <a:srgbClr val="7A869C"/>
                 </a:solidFill>
-                <a:latin typeface="나눔고딕코딩"/>
-                <a:ea typeface="나눔고딕코딩"/>
-                <a:cs typeface="나눔고딕코딩"/>
+                <a:latin typeface="D2Coding"/>
+                <a:ea typeface="D2Coding"/>
+                <a:cs typeface="D2Coding"/>
               </a:rPr>
               <a:t>4</a:t>
             </a:r>
@@ -56755,9 +56755,9 @@
                 <a:solidFill>
                   <a:srgbClr val="7A869C"/>
                 </a:solidFill>
-                <a:latin typeface="나눔고딕코딩"/>
-                <a:ea typeface="나눔고딕코딩"/>
-                <a:cs typeface="나눔고딕코딩"/>
+                <a:latin typeface="D2Coding"/>
+                <a:ea typeface="D2Coding"/>
+                <a:cs typeface="D2Coding"/>
               </a:rPr>
               <a:t>5</a:t>
             </a:r>
@@ -56773,9 +56773,9 @@
                 <a:solidFill>
                   <a:srgbClr val="7A869C"/>
                 </a:solidFill>
-                <a:latin typeface="나눔고딕코딩"/>
-                <a:ea typeface="나눔고딕코딩"/>
-                <a:cs typeface="나눔고딕코딩"/>
+                <a:latin typeface="D2Coding"/>
+                <a:ea typeface="D2Coding"/>
+                <a:cs typeface="D2Coding"/>
               </a:rPr>
               <a:t>6</a:t>
             </a:r>
@@ -56791,9 +56791,9 @@
                 <a:solidFill>
                   <a:srgbClr val="7A869C"/>
                 </a:solidFill>
-                <a:latin typeface="나눔고딕코딩"/>
-                <a:ea typeface="나눔고딕코딩"/>
-                <a:cs typeface="나눔고딕코딩"/>
+                <a:latin typeface="D2Coding"/>
+                <a:ea typeface="D2Coding"/>
+                <a:cs typeface="D2Coding"/>
               </a:rPr>
               <a:t>7</a:t>
             </a:r>
@@ -56809,9 +56809,9 @@
                 <a:solidFill>
                   <a:srgbClr val="7A869C"/>
                 </a:solidFill>
-                <a:latin typeface="나눔고딕코딩"/>
-                <a:ea typeface="나눔고딕코딩"/>
-                <a:cs typeface="나눔고딕코딩"/>
+                <a:latin typeface="D2Coding"/>
+                <a:ea typeface="D2Coding"/>
+                <a:cs typeface="D2Coding"/>
               </a:rPr>
               <a:t>8</a:t>
             </a:r>
@@ -56827,9 +56827,9 @@
                 <a:solidFill>
                   <a:srgbClr val="7A869C"/>
                 </a:solidFill>
-                <a:latin typeface="나눔고딕코딩"/>
-                <a:ea typeface="나눔고딕코딩"/>
-                <a:cs typeface="나눔고딕코딩"/>
+                <a:latin typeface="D2Coding"/>
+                <a:ea typeface="D2Coding"/>
+                <a:cs typeface="D2Coding"/>
               </a:rPr>
               <a:t>9</a:t>
             </a:r>
@@ -56845,9 +56845,9 @@
                 <a:solidFill>
                   <a:srgbClr val="7A869C"/>
                 </a:solidFill>
-                <a:latin typeface="나눔고딕코딩"/>
-                <a:ea typeface="나눔고딕코딩"/>
-                <a:cs typeface="나눔고딕코딩"/>
+                <a:latin typeface="D2Coding"/>
+                <a:ea typeface="D2Coding"/>
+                <a:cs typeface="D2Coding"/>
               </a:rPr>
               <a:t>10</a:t>
             </a:r>
@@ -56863,9 +56863,9 @@
                 <a:solidFill>
                   <a:srgbClr val="7A869C"/>
                 </a:solidFill>
-                <a:latin typeface="나눔고딕코딩"/>
-                <a:ea typeface="나눔고딕코딩"/>
-                <a:cs typeface="나눔고딕코딩"/>
+                <a:latin typeface="D2Coding"/>
+                <a:ea typeface="D2Coding"/>
+                <a:cs typeface="D2Coding"/>
               </a:rPr>
               <a:t>11</a:t>
             </a:r>
@@ -56881,9 +56881,9 @@
                 <a:solidFill>
                   <a:srgbClr val="7A869C"/>
                 </a:solidFill>
-                <a:latin typeface="나눔고딕코딩"/>
-                <a:ea typeface="나눔고딕코딩"/>
-                <a:cs typeface="나눔고딕코딩"/>
+                <a:latin typeface="D2Coding"/>
+                <a:ea typeface="D2Coding"/>
+                <a:cs typeface="D2Coding"/>
               </a:rPr>
               <a:t>12</a:t>
             </a:r>
@@ -56922,9 +56922,9 @@
                 <a:solidFill>
                   <a:srgbClr val="E6EAF2"/>
                 </a:solidFill>
-                <a:latin typeface="나눔고딕코딩"/>
-                <a:ea typeface="나눔고딕코딩"/>
-                <a:cs typeface="나눔고딕코딩"/>
+                <a:latin typeface="D2Coding"/>
+                <a:ea typeface="D2Coding"/>
+                <a:cs typeface="D2Coding"/>
               </a:rPr>
               <a:t>-- 고객 등급 목록 (중복 포함, 10행)</a:t>
             </a:r>
@@ -56940,9 +56940,9 @@
                 <a:solidFill>
                   <a:srgbClr val="E6EAF2"/>
                 </a:solidFill>
-                <a:latin typeface="나눔고딕코딩"/>
-                <a:ea typeface="나눔고딕코딩"/>
-                <a:cs typeface="나눔고딕코딩"/>
+                <a:latin typeface="D2Coding"/>
+                <a:ea typeface="D2Coding"/>
+                <a:cs typeface="D2Coding"/>
               </a:rPr>
               <a:t>SELECT grade FROM customers;</a:t>
             </a:r>
@@ -56958,9 +56958,9 @@
                 <a:solidFill>
                   <a:srgbClr val="E6EAF2"/>
                 </a:solidFill>
-                <a:latin typeface="나눔고딕코딩"/>
-                <a:ea typeface="나눔고딕코딩"/>
-                <a:cs typeface="나눔고딕코딩"/>
+                <a:latin typeface="D2Coding"/>
+                <a:ea typeface="D2Coding"/>
+                <a:cs typeface="D2Coding"/>
               </a:rPr>
               <a:t/>
             </a:r>
@@ -56976,9 +56976,9 @@
                 <a:solidFill>
                   <a:srgbClr val="E6EAF2"/>
                 </a:solidFill>
-                <a:latin typeface="나눔고딕코딩"/>
-                <a:ea typeface="나눔고딕코딩"/>
-                <a:cs typeface="나눔고딕코딩"/>
+                <a:latin typeface="D2Coding"/>
+                <a:ea typeface="D2Coding"/>
+                <a:cs typeface="D2Coding"/>
               </a:rPr>
               <a:t>-- 중복 제거 → VIP, GOLD, SILVER (3행)</a:t>
             </a:r>
@@ -56994,9 +56994,9 @@
                 <a:solidFill>
                   <a:srgbClr val="E6EAF2"/>
                 </a:solidFill>
-                <a:latin typeface="나눔고딕코딩"/>
-                <a:ea typeface="나눔고딕코딩"/>
-                <a:cs typeface="나눔고딕코딩"/>
+                <a:latin typeface="D2Coding"/>
+                <a:ea typeface="D2Coding"/>
+                <a:cs typeface="D2Coding"/>
               </a:rPr>
               <a:t>SELECT DISTINCT grade FROM customers;</a:t>
             </a:r>
@@ -57012,9 +57012,9 @@
                 <a:solidFill>
                   <a:srgbClr val="E6EAF2"/>
                 </a:solidFill>
-                <a:latin typeface="나눔고딕코딩"/>
-                <a:ea typeface="나눔고딕코딩"/>
-                <a:cs typeface="나눔고딕코딩"/>
+                <a:latin typeface="D2Coding"/>
+                <a:ea typeface="D2Coding"/>
+                <a:cs typeface="D2Coding"/>
               </a:rPr>
               <a:t/>
             </a:r>
@@ -57030,9 +57030,9 @@
                 <a:solidFill>
                   <a:srgbClr val="E6EAF2"/>
                 </a:solidFill>
-                <a:latin typeface="나눔고딕코딩"/>
-                <a:ea typeface="나눔고딕코딩"/>
-                <a:cs typeface="나눔고딕코딩"/>
+                <a:latin typeface="D2Coding"/>
+                <a:ea typeface="D2Coding"/>
+                <a:cs typeface="D2Coding"/>
               </a:rPr>
               <a:t>-- 여러 컬럼의 조합에 대해 중복 제거</a:t>
             </a:r>
@@ -57048,9 +57048,9 @@
                 <a:solidFill>
                   <a:srgbClr val="E6EAF2"/>
                 </a:solidFill>
-                <a:latin typeface="나눔고딕코딩"/>
-                <a:ea typeface="나눔고딕코딩"/>
-                <a:cs typeface="나눔고딕코딩"/>
+                <a:latin typeface="D2Coding"/>
+                <a:ea typeface="D2Coding"/>
+                <a:cs typeface="D2Coding"/>
               </a:rPr>
               <a:t>SELECT DISTINCT grade, city FROM customers;</a:t>
             </a:r>
@@ -57066,9 +57066,9 @@
                 <a:solidFill>
                   <a:srgbClr val="E6EAF2"/>
                 </a:solidFill>
-                <a:latin typeface="나눔고딕코딩"/>
-                <a:ea typeface="나눔고딕코딩"/>
-                <a:cs typeface="나눔고딕코딩"/>
+                <a:latin typeface="D2Coding"/>
+                <a:ea typeface="D2Coding"/>
+                <a:cs typeface="D2Coding"/>
               </a:rPr>
               <a:t/>
             </a:r>
@@ -57084,9 +57084,9 @@
                 <a:solidFill>
                   <a:srgbClr val="E6EAF2"/>
                 </a:solidFill>
-                <a:latin typeface="나눔고딕코딩"/>
-                <a:ea typeface="나눔고딕코딩"/>
-                <a:cs typeface="나눔고딕코딩"/>
+                <a:latin typeface="D2Coding"/>
+                <a:ea typeface="D2Coding"/>
+                <a:cs typeface="D2Coding"/>
               </a:rPr>
               <a:t>-- 중복 제거 후 개수 세기 (NULL은 제외됨)</a:t>
             </a:r>
@@ -57102,9 +57102,9 @@
                 <a:solidFill>
                   <a:srgbClr val="E6EAF2"/>
                 </a:solidFill>
-                <a:latin typeface="나눔고딕코딩"/>
-                <a:ea typeface="나눔고딕코딩"/>
-                <a:cs typeface="나눔고딕코딩"/>
+                <a:latin typeface="D2Coding"/>
+                <a:ea typeface="D2Coding"/>
+                <a:cs typeface="D2Coding"/>
               </a:rPr>
               <a:t>SELECT COUNT(DISTINCT city) AS 도시수 FROM customers;</a:t>
             </a:r>
@@ -57120,9 +57120,9 @@
                 <a:solidFill>
                   <a:srgbClr val="E6EAF2"/>
                 </a:solidFill>
-                <a:latin typeface="나눔고딕코딩"/>
-                <a:ea typeface="나눔고딕코딩"/>
-                <a:cs typeface="나눔고딕코딩"/>
+                <a:latin typeface="D2Coding"/>
+                <a:ea typeface="D2Coding"/>
+                <a:cs typeface="D2Coding"/>
               </a:rPr>
               <a:t>-- 서울·부산·대전·광주·인천 → 5 (C007의 city NULL은 제외)</a:t>
             </a:r>
